--- a/sales/U-writing_sales_v5.pptx
+++ b/sales/U-writing_sales_v5.pptx
@@ -34,7 +34,6 @@
     <p:sldId id="282" r:id="rId34"/>
     <p:sldId id="283" r:id="rId35"/>
     <p:sldId id="284" r:id="rId36"/>
-    <p:sldId id="285" r:id="rId37"/>
   </p:sldIdLst>
   <p:sldSz cx="12192000" cy="6858000" type="screen4x3"/>
   <p:notesSz cx="6858000" cy="9144000"/>
@@ -732,11 +731,6 @@
               <a:t>だから私は、作る前に「お客様がどこにいるか」を決めます。LPだけでなく、広告やLINEとのつなぎ方まで考えます。</a:t>
             </a:r>
           </a:p>
-          <a:p>
-            <a:r>
-              <a:t>【近い事例】CASE 03：広告・LP・LINEをつなぎ直して、月の売上が最大150万円</a:t>
-            </a:r>
-          </a:p>
         </p:txBody>
       </p:sp>
       <p:sp>
@@ -1715,17 +1709,22 @@
           <a:lstStyle/>
           <a:p>
             <a:r>
-              <a:t>料金はこちらです。今日のお話だと、【○○プラン】が近いと思います。</a:t>
-            </a:r>
-          </a:p>
-          <a:p>
-            <a:r>
-              <a:t>正式な金額は、伺った内容をもとにお見積りしますね。</a:t>
-            </a:r>
-          </a:p>
-          <a:p>
-            <a:r>
-              <a:t>（全プランを説明しない。勧めるプランの行だけ指差す）</a:t>
+              <a:t>料金はこちらです。制作代行は単発で5,000円から、顧問プランは月額49,800円からです。</a:t>
+            </a:r>
+          </a:p>
+          <a:p>
+            <a:r>
+              <a:t>各種制作の目安は下の表のとおりです。今日のお話だと、【○○】が近いと思います。正式な金額は、伺った内容をもとにお見積りしますね。</a:t>
+            </a:r>
+          </a:p>
+          <a:p>
+            <a:r>
+              <a:t>顧問プランの契約中は、制作代行が20%引きになります。</a:t>
+            </a:r>
+          </a:p>
+          <a:p>
+            <a:r>
+              <a:t>（全部説明しない。相手に関係する行だけ指差す）</a:t>
             </a:r>
           </a:p>
         </p:txBody>
@@ -2374,17 +2373,17 @@
           <a:lstStyle/>
           <a:p>
             <a:r>
-              <a:t>カワリミは、集客に必要な広告づくりを私が代わりにやるサービスです。</a:t>
-            </a:r>
-          </a:p>
-          <a:p>
-            <a:r>
-              <a:t>企画・構成から制作・運用まで丸投げいただけます。お願いするのは、必要な情報と素材のご提供だけです。</a:t>
-            </a:r>
-          </a:p>
-          <a:p>
-            <a:r>
-              <a:t>（相手に関係のあるメニューだけ指差す。全部読み上げない）</a:t>
+              <a:t>ミチスジは、ご自身で動きたい方の横で、道筋を示し続けるサービスです。</a:t>
+            </a:r>
+          </a:p>
+          <a:p>
+            <a:r>
+              <a:t>いきなり顧問でなくても大丈夫です。まずは1回の相談から、必要なら提案書、続けるなら顧問、と段階的に使えます。</a:t>
+            </a:r>
+          </a:p>
+          <a:p>
+            <a:r>
+              <a:t>顧問中は、制作代行が20%引きになります。</a:t>
             </a:r>
           </a:p>
         </p:txBody>
@@ -2526,86 +2525,6 @@
 </p:notes>
 </file>
 
-<file path=ppt/notesSlides/notesSlide30.xml><?xml version="1.0" encoding="utf-8"?>
-<p:notes xmlns:a="http://schemas.openxmlformats.org/drawingml/2006/main" xmlns:p="http://schemas.openxmlformats.org/presentationml/2006/main" xmlns:r="http://schemas.openxmlformats.org/officeDocument/2006/relationships">
-  <p:cSld>
-    <p:spTree>
-      <p:nvGrpSpPr>
-        <p:cNvPr id="1" name=""/>
-        <p:cNvGrpSpPr/>
-        <p:nvPr/>
-      </p:nvGrpSpPr>
-      <p:grpSpPr>
-        <a:xfrm>
-          <a:off x="0" y="0"/>
-          <a:ext cx="0" cy="0"/>
-          <a:chOff x="0" y="0"/>
-          <a:chExt cx="0" cy="0"/>
-        </a:xfrm>
-      </p:grpSpPr>
-      <p:sp>
-        <p:nvSpPr>
-          <p:cNvPr id="2" name="Slide Image Placeholder 1"/>
-          <p:cNvSpPr>
-            <a:spLocks noGrp="1"/>
-          </p:cNvSpPr>
-          <p:nvPr>
-            <p:ph type="sldImg" idx="2"/>
-          </p:nvPr>
-        </p:nvSpPr>
-        <p:spPr/>
-      </p:sp>
-      <p:sp>
-        <p:nvSpPr>
-          <p:cNvPr id="3" name="Notes Placeholder 2"/>
-          <p:cNvSpPr>
-            <a:spLocks noGrp="1"/>
-          </p:cNvSpPr>
-          <p:nvPr>
-            <p:ph type="body" idx="3" sz="quarter"/>
-          </p:nvPr>
-        </p:nvSpPr>
-        <p:spPr/>
-        <p:txBody>
-          <a:bodyPr/>
-          <a:lstStyle/>
-          <a:p>
-            <a:r>
-              <a:t>ミチスジは、ご自身で動きたい方の横で、道筋を示し続けるサービスです。</a:t>
-            </a:r>
-          </a:p>
-          <a:p>
-            <a:r>
-              <a:t>いきなり顧問でなくても大丈夫です。まずは1回の相談から、必要なら提案書、続けるなら顧問、と段階的に使えます。</a:t>
-            </a:r>
-          </a:p>
-          <a:p>
-            <a:r>
-              <a:t>顧問中は、制作代行が20%引きになります。</a:t>
-            </a:r>
-          </a:p>
-        </p:txBody>
-      </p:sp>
-      <p:sp>
-        <p:nvSpPr>
-          <p:cNvPr id="4" name="Slide Number Placeholder 3"/>
-          <p:cNvSpPr>
-            <a:spLocks noGrp="1"/>
-          </p:cNvSpPr>
-          <p:nvPr>
-            <p:ph type="sldNum" idx="5" sz="quarter"/>
-          </p:nvPr>
-        </p:nvSpPr>
-        <p:spPr/>
-      </p:sp>
-    </p:spTree>
-  </p:cSld>
-  <p:clrMapOvr>
-    <a:masterClrMapping/>
-  </p:clrMapOvr>
-</p:notes>
-</file>
-
 <file path=ppt/notesSlides/notesSlide4.xml><?xml version="1.0" encoding="utf-8"?>
 <p:notes xmlns:a="http://schemas.openxmlformats.org/drawingml/2006/main" xmlns:p="http://schemas.openxmlformats.org/presentationml/2006/main" xmlns:r="http://schemas.openxmlformats.org/officeDocument/2006/relationships">
   <p:cSld>
@@ -3048,11 +2967,6 @@
               <a:t>だから私は、まずターゲットの悩みと、使った後の理想の姿を言葉にするところから始めます。</a:t>
             </a:r>
           </a:p>
-          <a:p>
-            <a:r>
-              <a:t>【近い事例】CASE 01：寝具を「朝の目覚め」の体験で伝えて目標の279%</a:t>
-            </a:r>
-          </a:p>
         </p:txBody>
       </p:sp>
       <p:sp>
@@ -3126,11 +3040,6 @@
           <a:p>
             <a:r>
               <a:t>大事なのは「なぜあなたに頼むのか」。それはたいてい、ご本人の経歴や想いの中に埋まっていて、ご自身では気づいていないことが多いです。私はヒアリングで、そこを掘り起こします。</a:t>
-            </a:r>
-          </a:p>
-          <a:p>
-            <a:r>
-              <a:t>【近い事例】CASE 04：求める人物像と代表の想いを記事にして、1週間で内定</a:t>
             </a:r>
           </a:p>
         </p:txBody>
@@ -7572,47 +7481,6 @@
           </a:p>
         </p:txBody>
       </p:sp>
-      <p:sp>
-        <p:nvSpPr>
-          <p:cNvPr id="16" name="TextBox 15"/>
-          <p:cNvSpPr txBox="1"/>
-          <p:nvPr/>
-        </p:nvSpPr>
-        <p:spPr>
-          <a:xfrm>
-            <a:off x="6512000" y="5700000"/>
-            <a:ext cx="4918000" cy="400000"/>
-          </a:xfrm>
-          <a:prstGeom prst="rect">
-            <a:avLst/>
-          </a:prstGeom>
-          <a:noFill/>
-        </p:spPr>
-        <p:txBody>
-          <a:bodyPr wrap="square" anchor="t" lIns="0" rIns="0" tIns="0" bIns="0">
-            <a:spAutoFit/>
-          </a:bodyPr>
-          <a:lstStyle/>
-          <a:p>
-            <a:pPr algn="l">
-              <a:lnSpc>
-                <a:spcPct val="130000"/>
-              </a:lnSpc>
-            </a:pPr>
-            <a:r>
-              <a:rPr sz="1000" b="0">
-                <a:solidFill>
-                  <a:srgbClr val="5E5E5E"/>
-                </a:solidFill>
-                <a:latin typeface="Noto Sans JP"/>
-                <a:ea typeface="Noto Sans JP"/>
-                <a:cs typeface="Noto Sans JP"/>
-              </a:rPr>
-              <a:t>関連事例 ▶ CASE 03：広告・LP・LINEをつなぎ直して、月の売上が最大150万円</a:t>
-            </a:r>
-          </a:p>
-        </p:txBody>
-      </p:sp>
     </p:spTree>
   </p:cSld>
   <p:clrMapOvr>
@@ -17833,17 +17701,521 @@
           </a:p>
         </p:txBody>
       </p:sp>
+      <p:sp>
+        <p:nvSpPr>
+          <p:cNvPr id="8" name="Rectangle 7"/>
+          <p:cNvSpPr/>
+          <p:nvPr/>
+        </p:nvSpPr>
+        <p:spPr>
+          <a:xfrm>
+            <a:off x="762000" y="1550000"/>
+            <a:ext cx="5180000" cy="1150000"/>
+          </a:xfrm>
+          <a:prstGeom prst="rect">
+            <a:avLst/>
+          </a:prstGeom>
+          <a:solidFill>
+            <a:srgbClr val="F7F3EA"/>
+          </a:solidFill>
+          <a:ln>
+            <a:noFill/>
+          </a:ln>
+          <a:effectLst/>
+        </p:spPr>
+        <p:style>
+          <a:lnRef idx="1">
+            <a:schemeClr val="accent1"/>
+          </a:lnRef>
+          <a:fillRef idx="3">
+            <a:schemeClr val="accent1"/>
+          </a:fillRef>
+          <a:effectRef idx="2">
+            <a:schemeClr val="accent1"/>
+          </a:effectRef>
+          <a:fontRef idx="minor">
+            <a:schemeClr val="lt1"/>
+          </a:fontRef>
+        </p:style>
+        <p:txBody>
+          <a:bodyPr rtlCol="0" anchor="ctr"/>
+          <a:lstStyle/>
+          <a:p>
+            <a:pPr algn="ctr"/>
+          </a:p>
+        </p:txBody>
+      </p:sp>
+      <p:sp>
+        <p:nvSpPr>
+          <p:cNvPr id="9" name="Rectangle 8"/>
+          <p:cNvSpPr/>
+          <p:nvPr/>
+        </p:nvSpPr>
+        <p:spPr>
+          <a:xfrm>
+            <a:off x="762000" y="1550000"/>
+            <a:ext cx="76200" cy="1150000"/>
+          </a:xfrm>
+          <a:prstGeom prst="rect">
+            <a:avLst/>
+          </a:prstGeom>
+          <a:solidFill>
+            <a:srgbClr val="2B2B2B"/>
+          </a:solidFill>
+          <a:ln>
+            <a:noFill/>
+          </a:ln>
+          <a:effectLst/>
+        </p:spPr>
+        <p:style>
+          <a:lnRef idx="1">
+            <a:schemeClr val="accent1"/>
+          </a:lnRef>
+          <a:fillRef idx="3">
+            <a:schemeClr val="accent1"/>
+          </a:fillRef>
+          <a:effectRef idx="2">
+            <a:schemeClr val="accent1"/>
+          </a:effectRef>
+          <a:fontRef idx="minor">
+            <a:schemeClr val="lt1"/>
+          </a:fontRef>
+        </p:style>
+        <p:txBody>
+          <a:bodyPr rtlCol="0" anchor="ctr"/>
+          <a:lstStyle/>
+          <a:p>
+            <a:pPr algn="ctr"/>
+          </a:p>
+        </p:txBody>
+      </p:sp>
+      <p:sp>
+        <p:nvSpPr>
+          <p:cNvPr id="10" name="TextBox 9"/>
+          <p:cNvSpPr txBox="1"/>
+          <p:nvPr/>
+        </p:nvSpPr>
+        <p:spPr>
+          <a:xfrm>
+            <a:off x="1062000" y="1680000"/>
+            <a:ext cx="4580000" cy="350000"/>
+          </a:xfrm>
+          <a:prstGeom prst="rect">
+            <a:avLst/>
+          </a:prstGeom>
+          <a:noFill/>
+        </p:spPr>
+        <p:txBody>
+          <a:bodyPr wrap="square" anchor="t" lIns="0" rIns="0" tIns="0" bIns="0">
+            <a:spAutoFit/>
+          </a:bodyPr>
+          <a:lstStyle/>
+          <a:p>
+            <a:pPr algn="l">
+              <a:lnSpc>
+                <a:spcPct val="125000"/>
+              </a:lnSpc>
+            </a:pPr>
+            <a:r>
+              <a:rPr sz="1500" b="1">
+                <a:solidFill>
+                  <a:srgbClr val="2B2B2B"/>
+                </a:solidFill>
+                <a:latin typeface="Noto Sans JP"/>
+                <a:ea typeface="Noto Sans JP"/>
+                <a:cs typeface="Noto Sans JP"/>
+              </a:rPr>
+              <a:t>制作代行「カワリミ」</a:t>
+            </a:r>
+          </a:p>
+        </p:txBody>
+      </p:sp>
+      <p:sp>
+        <p:nvSpPr>
+          <p:cNvPr id="11" name="TextBox 10"/>
+          <p:cNvSpPr txBox="1"/>
+          <p:nvPr/>
+        </p:nvSpPr>
+        <p:spPr>
+          <a:xfrm>
+            <a:off x="1062000" y="2100000"/>
+            <a:ext cx="2280000" cy="350000"/>
+          </a:xfrm>
+          <a:prstGeom prst="rect">
+            <a:avLst/>
+          </a:prstGeom>
+          <a:noFill/>
+        </p:spPr>
+        <p:txBody>
+          <a:bodyPr wrap="square" anchor="t" lIns="0" rIns="0" tIns="0" bIns="0">
+            <a:spAutoFit/>
+          </a:bodyPr>
+          <a:lstStyle/>
+          <a:p>
+            <a:pPr algn="l">
+              <a:lnSpc>
+                <a:spcPct val="125000"/>
+              </a:lnSpc>
+            </a:pPr>
+            <a:r>
+              <a:rPr sz="1100" b="0">
+                <a:solidFill>
+                  <a:srgbClr val="5E5E5E"/>
+                </a:solidFill>
+                <a:latin typeface="Noto Sans JP"/>
+                <a:ea typeface="Noto Sans JP"/>
+                <a:cs typeface="Noto Sans JP"/>
+              </a:rPr>
+              <a:t>広告物の制作・運用を代行</a:t>
+            </a:r>
+          </a:p>
+        </p:txBody>
+      </p:sp>
+      <p:sp>
+        <p:nvSpPr>
+          <p:cNvPr id="12" name="TextBox 11"/>
+          <p:cNvSpPr txBox="1"/>
+          <p:nvPr/>
+        </p:nvSpPr>
+        <p:spPr>
+          <a:xfrm>
+            <a:off x="3342000" y="2020000"/>
+            <a:ext cx="600000" cy="400000"/>
+          </a:xfrm>
+          <a:prstGeom prst="rect">
+            <a:avLst/>
+          </a:prstGeom>
+          <a:noFill/>
+        </p:spPr>
+        <p:txBody>
+          <a:bodyPr wrap="square" anchor="t" lIns="0" rIns="0" tIns="0" bIns="0">
+            <a:spAutoFit/>
+          </a:bodyPr>
+          <a:lstStyle/>
+          <a:p>
+            <a:pPr algn="l">
+              <a:lnSpc>
+                <a:spcPct val="125000"/>
+              </a:lnSpc>
+            </a:pPr>
+            <a:r>
+              <a:rPr sz="1200" b="0">
+                <a:solidFill>
+                  <a:srgbClr val="5E5E5E"/>
+                </a:solidFill>
+                <a:latin typeface="Noto Sans JP"/>
+                <a:ea typeface="Noto Sans JP"/>
+                <a:cs typeface="Noto Sans JP"/>
+              </a:rPr>
+              <a:t>単発</a:t>
+            </a:r>
+          </a:p>
+        </p:txBody>
+      </p:sp>
+      <p:sp>
+        <p:nvSpPr>
+          <p:cNvPr id="13" name="TextBox 12"/>
+          <p:cNvSpPr txBox="1"/>
+          <p:nvPr/>
+        </p:nvSpPr>
+        <p:spPr>
+          <a:xfrm>
+            <a:off x="3842000" y="1900000"/>
+            <a:ext cx="1850000" cy="600000"/>
+          </a:xfrm>
+          <a:prstGeom prst="rect">
+            <a:avLst/>
+          </a:prstGeom>
+          <a:noFill/>
+        </p:spPr>
+        <p:txBody>
+          <a:bodyPr wrap="square" anchor="t" lIns="0" rIns="0" tIns="0" bIns="0">
+            <a:spAutoFit/>
+          </a:bodyPr>
+          <a:lstStyle/>
+          <a:p>
+            <a:pPr algn="r">
+              <a:lnSpc>
+                <a:spcPct val="125000"/>
+              </a:lnSpc>
+            </a:pPr>
+            <a:r>
+              <a:rPr sz="2400" b="1">
+                <a:solidFill>
+                  <a:srgbClr val="C6A15B"/>
+                </a:solidFill>
+                <a:latin typeface="Noto Sans JP"/>
+                <a:ea typeface="Noto Sans JP"/>
+                <a:cs typeface="Noto Sans JP"/>
+              </a:rPr>
+              <a:t>5,000円〜</a:t>
+            </a:r>
+          </a:p>
+        </p:txBody>
+      </p:sp>
+      <p:sp>
+        <p:nvSpPr>
+          <p:cNvPr id="14" name="Rectangle 13"/>
+          <p:cNvSpPr/>
+          <p:nvPr/>
+        </p:nvSpPr>
+        <p:spPr>
+          <a:xfrm>
+            <a:off x="6250000" y="1550000"/>
+            <a:ext cx="5180000" cy="1150000"/>
+          </a:xfrm>
+          <a:prstGeom prst="rect">
+            <a:avLst/>
+          </a:prstGeom>
+          <a:solidFill>
+            <a:srgbClr val="F7F3EA"/>
+          </a:solidFill>
+          <a:ln>
+            <a:noFill/>
+          </a:ln>
+          <a:effectLst/>
+        </p:spPr>
+        <p:style>
+          <a:lnRef idx="1">
+            <a:schemeClr val="accent1"/>
+          </a:lnRef>
+          <a:fillRef idx="3">
+            <a:schemeClr val="accent1"/>
+          </a:fillRef>
+          <a:effectRef idx="2">
+            <a:schemeClr val="accent1"/>
+          </a:effectRef>
+          <a:fontRef idx="minor">
+            <a:schemeClr val="lt1"/>
+          </a:fontRef>
+        </p:style>
+        <p:txBody>
+          <a:bodyPr rtlCol="0" anchor="ctr"/>
+          <a:lstStyle/>
+          <a:p>
+            <a:pPr algn="ctr"/>
+          </a:p>
+        </p:txBody>
+      </p:sp>
+      <p:sp>
+        <p:nvSpPr>
+          <p:cNvPr id="15" name="Rectangle 14"/>
+          <p:cNvSpPr/>
+          <p:nvPr/>
+        </p:nvSpPr>
+        <p:spPr>
+          <a:xfrm>
+            <a:off x="6250000" y="1550000"/>
+            <a:ext cx="76200" cy="1150000"/>
+          </a:xfrm>
+          <a:prstGeom prst="rect">
+            <a:avLst/>
+          </a:prstGeom>
+          <a:solidFill>
+            <a:srgbClr val="C6A15B"/>
+          </a:solidFill>
+          <a:ln>
+            <a:noFill/>
+          </a:ln>
+          <a:effectLst/>
+        </p:spPr>
+        <p:style>
+          <a:lnRef idx="1">
+            <a:schemeClr val="accent1"/>
+          </a:lnRef>
+          <a:fillRef idx="3">
+            <a:schemeClr val="accent1"/>
+          </a:fillRef>
+          <a:effectRef idx="2">
+            <a:schemeClr val="accent1"/>
+          </a:effectRef>
+          <a:fontRef idx="minor">
+            <a:schemeClr val="lt1"/>
+          </a:fontRef>
+        </p:style>
+        <p:txBody>
+          <a:bodyPr rtlCol="0" anchor="ctr"/>
+          <a:lstStyle/>
+          <a:p>
+            <a:pPr algn="ctr"/>
+          </a:p>
+        </p:txBody>
+      </p:sp>
+      <p:sp>
+        <p:nvSpPr>
+          <p:cNvPr id="16" name="TextBox 15"/>
+          <p:cNvSpPr txBox="1"/>
+          <p:nvPr/>
+        </p:nvSpPr>
+        <p:spPr>
+          <a:xfrm>
+            <a:off x="6550000" y="1680000"/>
+            <a:ext cx="4580000" cy="350000"/>
+          </a:xfrm>
+          <a:prstGeom prst="rect">
+            <a:avLst/>
+          </a:prstGeom>
+          <a:noFill/>
+        </p:spPr>
+        <p:txBody>
+          <a:bodyPr wrap="square" anchor="t" lIns="0" rIns="0" tIns="0" bIns="0">
+            <a:spAutoFit/>
+          </a:bodyPr>
+          <a:lstStyle/>
+          <a:p>
+            <a:pPr algn="l">
+              <a:lnSpc>
+                <a:spcPct val="125000"/>
+              </a:lnSpc>
+            </a:pPr>
+            <a:r>
+              <a:rPr sz="1500" b="1">
+                <a:solidFill>
+                  <a:srgbClr val="2B2B2B"/>
+                </a:solidFill>
+                <a:latin typeface="Noto Sans JP"/>
+                <a:ea typeface="Noto Sans JP"/>
+                <a:cs typeface="Noto Sans JP"/>
+              </a:rPr>
+              <a:t>集客顧問「ミチスジ」顧問プラン</a:t>
+            </a:r>
+          </a:p>
+        </p:txBody>
+      </p:sp>
+      <p:sp>
+        <p:nvSpPr>
+          <p:cNvPr id="17" name="TextBox 16"/>
+          <p:cNvSpPr txBox="1"/>
+          <p:nvPr/>
+        </p:nvSpPr>
+        <p:spPr>
+          <a:xfrm>
+            <a:off x="6550000" y="2100000"/>
+            <a:ext cx="2280000" cy="350000"/>
+          </a:xfrm>
+          <a:prstGeom prst="rect">
+            <a:avLst/>
+          </a:prstGeom>
+          <a:noFill/>
+        </p:spPr>
+        <p:txBody>
+          <a:bodyPr wrap="square" anchor="t" lIns="0" rIns="0" tIns="0" bIns="0">
+            <a:spAutoFit/>
+          </a:bodyPr>
+          <a:lstStyle/>
+          <a:p>
+            <a:pPr algn="l">
+              <a:lnSpc>
+                <a:spcPct val="125000"/>
+              </a:lnSpc>
+            </a:pPr>
+            <a:r>
+              <a:rPr sz="1100" b="0">
+                <a:solidFill>
+                  <a:srgbClr val="5E5E5E"/>
+                </a:solidFill>
+                <a:latin typeface="Noto Sans JP"/>
+                <a:ea typeface="Noto Sans JP"/>
+                <a:cs typeface="Noto Sans JP"/>
+              </a:rPr>
+              <a:t>月4時間までのZoom相談</a:t>
+            </a:r>
+          </a:p>
+        </p:txBody>
+      </p:sp>
+      <p:sp>
+        <p:nvSpPr>
+          <p:cNvPr id="18" name="TextBox 17"/>
+          <p:cNvSpPr txBox="1"/>
+          <p:nvPr/>
+        </p:nvSpPr>
+        <p:spPr>
+          <a:xfrm>
+            <a:off x="8830000" y="2020000"/>
+            <a:ext cx="600000" cy="400000"/>
+          </a:xfrm>
+          <a:prstGeom prst="rect">
+            <a:avLst/>
+          </a:prstGeom>
+          <a:noFill/>
+        </p:spPr>
+        <p:txBody>
+          <a:bodyPr wrap="square" anchor="t" lIns="0" rIns="0" tIns="0" bIns="0">
+            <a:spAutoFit/>
+          </a:bodyPr>
+          <a:lstStyle/>
+          <a:p>
+            <a:pPr algn="l">
+              <a:lnSpc>
+                <a:spcPct val="125000"/>
+              </a:lnSpc>
+            </a:pPr>
+            <a:r>
+              <a:rPr sz="1200" b="0">
+                <a:solidFill>
+                  <a:srgbClr val="5E5E5E"/>
+                </a:solidFill>
+                <a:latin typeface="Noto Sans JP"/>
+                <a:ea typeface="Noto Sans JP"/>
+                <a:cs typeface="Noto Sans JP"/>
+              </a:rPr>
+              <a:t>月額</a:t>
+            </a:r>
+          </a:p>
+        </p:txBody>
+      </p:sp>
+      <p:sp>
+        <p:nvSpPr>
+          <p:cNvPr id="19" name="TextBox 18"/>
+          <p:cNvSpPr txBox="1"/>
+          <p:nvPr/>
+        </p:nvSpPr>
+        <p:spPr>
+          <a:xfrm>
+            <a:off x="9330000" y="1900000"/>
+            <a:ext cx="1850000" cy="600000"/>
+          </a:xfrm>
+          <a:prstGeom prst="rect">
+            <a:avLst/>
+          </a:prstGeom>
+          <a:noFill/>
+        </p:spPr>
+        <p:txBody>
+          <a:bodyPr wrap="square" anchor="t" lIns="0" rIns="0" tIns="0" bIns="0">
+            <a:spAutoFit/>
+          </a:bodyPr>
+          <a:lstStyle/>
+          <a:p>
+            <a:pPr algn="r">
+              <a:lnSpc>
+                <a:spcPct val="125000"/>
+              </a:lnSpc>
+            </a:pPr>
+            <a:r>
+              <a:rPr sz="2400" b="1">
+                <a:solidFill>
+                  <a:srgbClr val="C6A15B"/>
+                </a:solidFill>
+                <a:latin typeface="Noto Sans JP"/>
+                <a:ea typeface="Noto Sans JP"/>
+                <a:cs typeface="Noto Sans JP"/>
+              </a:rPr>
+              <a:t>49,800円〜</a:t>
+            </a:r>
+          </a:p>
+        </p:txBody>
+      </p:sp>
       <p:graphicFrame>
         <p:nvGraphicFramePr>
-          <p:cNvPr id="8" name="Table 7"/>
+          <p:cNvPr id="20" name="Table 19"/>
           <p:cNvGraphicFramePr>
             <a:graphicFrameLocks noGrp="1"/>
           </p:cNvGraphicFramePr>
           <p:nvPr/>
         </p:nvGraphicFramePr>
         <p:xfrm>
-          <a:off x="762000" y="1700000"/>
-          <a:ext cx="10668000" cy="3600000"/>
+          <a:off x="762000" y="2900000"/>
+          <a:ext cx="10668000" cy="2800000"/>
         </p:xfrm>
         <a:graphic>
           <a:graphicData uri="http://schemas.openxmlformats.org/drawingml/2006/table">
@@ -17852,11 +18224,11 @@
                 <a:tableStyleId>{5C22544A-7EE6-4342-B048-85BDC9FD1C3A}</a:tableStyleId>
               </a:tblPr>
               <a:tblGrid>
-                <a:gridCol w="3300000"/>
-                <a:gridCol w="5100000"/>
-                <a:gridCol w="2268000"/>
+                <a:gridCol w="1700000"/>
+                <a:gridCol w="5300000"/>
+                <a:gridCol w="3668000"/>
               </a:tblGrid>
-              <a:tr h="720000">
+              <a:tr h="400000">
                 <a:tc>
                   <a:txBody>
                     <a:bodyPr/>
@@ -17864,7 +18236,7 @@
                     <a:p>
                       <a:pPr algn="l"/>
                       <a:r>
-                        <a:rPr sz="1200" b="1">
+                        <a:rPr sz="1100" b="1">
                           <a:solidFill>
                             <a:srgbClr val="FFFFFF"/>
                           </a:solidFill>
@@ -17872,11 +18244,11 @@
                           <a:ea typeface="Noto Sans JP"/>
                           <a:cs typeface="Noto Sans JP"/>
                         </a:rPr>
-                        <a:t>プラン</a:t>
+                        <a:t>カテゴリー</a:t>
                       </a:r>
                     </a:p>
                   </a:txBody>
-                  <a:tcPr anchor="ctr" marL="180000" marR="180000">
+                  <a:tcPr anchor="ctr" marL="150000" marR="150000" marT="30000" marB="30000">
                     <a:solidFill>
                       <a:srgbClr val="2B2B2B"/>
                     </a:solidFill>
@@ -17889,7 +18261,7 @@
                     <a:p>
                       <a:pPr algn="l"/>
                       <a:r>
-                        <a:rPr sz="1200" b="1">
+                        <a:rPr sz="1100" b="1">
                           <a:solidFill>
                             <a:srgbClr val="FFFFFF"/>
                           </a:solidFill>
@@ -17897,11 +18269,11 @@
                           <a:ea typeface="Noto Sans JP"/>
                           <a:cs typeface="Noto Sans JP"/>
                         </a:rPr>
-                        <a:t>内容</a:t>
+                        <a:t>各種制作メニュー</a:t>
                       </a:r>
                     </a:p>
                   </a:txBody>
-                  <a:tcPr anchor="ctr" marL="180000" marR="180000">
+                  <a:tcPr anchor="ctr" marL="150000" marR="150000" marT="30000" marB="30000">
                     <a:solidFill>
                       <a:srgbClr val="2B2B2B"/>
                     </a:solidFill>
@@ -17914,7 +18286,7 @@
                     <a:p>
                       <a:pPr algn="l"/>
                       <a:r>
-                        <a:rPr sz="1200" b="1">
+                        <a:rPr sz="1100" b="1">
                           <a:solidFill>
                             <a:srgbClr val="FFFFFF"/>
                           </a:solidFill>
@@ -17926,14 +18298,14 @@
                       </a:r>
                     </a:p>
                   </a:txBody>
-                  <a:tcPr anchor="ctr" marL="180000" marR="180000">
+                  <a:tcPr anchor="ctr" marL="150000" marR="150000" marT="30000" marB="30000">
                     <a:solidFill>
                       <a:srgbClr val="2B2B2B"/>
                     </a:solidFill>
                   </a:tcPr>
                 </a:tc>
               </a:tr>
-              <a:tr h="720000">
+              <a:tr h="400000">
                 <a:tc>
                   <a:txBody>
                     <a:bodyPr/>
@@ -17941,7 +18313,7 @@
                     <a:p>
                       <a:pPr algn="l"/>
                       <a:r>
-                        <a:rPr sz="1400" b="1">
+                        <a:rPr sz="1200" b="0">
                           <a:solidFill>
                             <a:srgbClr val="2B2B2B"/>
                           </a:solidFill>
@@ -17949,11 +18321,11 @@
                           <a:ea typeface="Noto Sans JP"/>
                           <a:cs typeface="Noto Sans JP"/>
                         </a:rPr>
-                        <a:t>制作代行「カワリミ」</a:t>
+                        <a:t>Web制作</a:t>
                       </a:r>
                     </a:p>
                   </a:txBody>
-                  <a:tcPr anchor="ctr" marL="180000" marR="180000">
+                  <a:tcPr anchor="ctr" marL="150000" marR="150000" marT="30000" marB="30000">
                     <a:solidFill>
                       <a:srgbClr val="FFFFFF"/>
                     </a:solidFill>
@@ -17974,11 +18346,11 @@
                           <a:ea typeface="Noto Sans JP"/>
                           <a:cs typeface="Noto Sans JP"/>
                         </a:rPr>
-                        <a:t>広告物の制作・運用を代行（LP・HP、LINE、Meta広告、チラシなど）</a:t>
+                        <a:t>LP制作・HP制作（Wix／ペライチ／WordPress）</a:t>
                       </a:r>
                     </a:p>
                   </a:txBody>
-                  <a:tcPr anchor="ctr" marL="180000" marR="180000">
+                  <a:tcPr anchor="ctr" marL="150000" marR="150000" marT="30000" marB="30000">
                     <a:solidFill>
                       <a:srgbClr val="FFFFFF"/>
                     </a:solidFill>
@@ -17991,7 +18363,7 @@
                     <a:p>
                       <a:pPr algn="r"/>
                       <a:r>
-                        <a:rPr sz="1400" b="1">
+                        <a:rPr sz="1200" b="1">
                           <a:solidFill>
                             <a:srgbClr val="C6A15B"/>
                           </a:solidFill>
@@ -17999,18 +18371,18 @@
                           <a:ea typeface="Noto Sans JP"/>
                           <a:cs typeface="Noto Sans JP"/>
                         </a:rPr>
-                        <a:t>単発 5,000円〜</a:t>
+                        <a:t>100,000円〜</a:t>
                       </a:r>
                     </a:p>
                   </a:txBody>
-                  <a:tcPr anchor="ctr" marL="180000" marR="180000">
+                  <a:tcPr anchor="ctr" marL="150000" marR="150000" marT="30000" marB="30000">
                     <a:solidFill>
                       <a:srgbClr val="FFFFFF"/>
                     </a:solidFill>
                   </a:tcPr>
                 </a:tc>
               </a:tr>
-              <a:tr h="720000">
+              <a:tr h="400000">
                 <a:tc>
                   <a:txBody>
                     <a:bodyPr/>
@@ -18018,7 +18390,7 @@
                     <a:p>
                       <a:pPr algn="l"/>
                       <a:r>
-                        <a:rPr sz="1400" b="1">
+                        <a:rPr sz="1200" b="0">
                           <a:solidFill>
                             <a:srgbClr val="2B2B2B"/>
                           </a:solidFill>
@@ -18026,11 +18398,11 @@
                           <a:ea typeface="Noto Sans JP"/>
                           <a:cs typeface="Noto Sans JP"/>
                         </a:rPr>
-                        <a:t>集客顧問「ミチスジ」顧問プラン</a:t>
+                        <a:t>Web制作</a:t>
                       </a:r>
                     </a:p>
                   </a:txBody>
-                  <a:tcPr anchor="ctr" marL="180000" marR="180000">
+                  <a:tcPr anchor="ctr" marL="150000" marR="150000" marT="30000" marB="30000">
                     <a:solidFill>
                       <a:srgbClr val="F7F3EA"/>
                     </a:solidFill>
@@ -18051,11 +18423,11 @@
                           <a:ea typeface="Noto Sans JP"/>
                           <a:cs typeface="Noto Sans JP"/>
                         </a:rPr>
-                        <a:t>月最大4時間のZoom相談、添削、施策の分析・仮説検証</a:t>
+                        <a:t>LPライティング（構成・原稿・ワイヤー作成）</a:t>
                       </a:r>
                     </a:p>
                   </a:txBody>
-                  <a:tcPr anchor="ctr" marL="180000" marR="180000">
+                  <a:tcPr anchor="ctr" marL="150000" marR="150000" marT="30000" marB="30000">
                     <a:solidFill>
                       <a:srgbClr val="F7F3EA"/>
                     </a:solidFill>
@@ -18068,7 +18440,7 @@
                     <a:p>
                       <a:pPr algn="r"/>
                       <a:r>
-                        <a:rPr sz="1400" b="1">
+                        <a:rPr sz="1200" b="1">
                           <a:solidFill>
                             <a:srgbClr val="C6A15B"/>
                           </a:solidFill>
@@ -18076,18 +18448,18 @@
                           <a:ea typeface="Noto Sans JP"/>
                           <a:cs typeface="Noto Sans JP"/>
                         </a:rPr>
-                        <a:t>月額 49,800円〜</a:t>
+                        <a:t>80,000円〜</a:t>
                       </a:r>
                     </a:p>
                   </a:txBody>
-                  <a:tcPr anchor="ctr" marL="180000" marR="180000">
+                  <a:tcPr anchor="ctr" marL="150000" marR="150000" marT="30000" marB="30000">
                     <a:solidFill>
                       <a:srgbClr val="F7F3EA"/>
                     </a:solidFill>
                   </a:tcPr>
                 </a:tc>
               </a:tr>
-              <a:tr h="720000">
+              <a:tr h="400000">
                 <a:tc>
                   <a:txBody>
                     <a:bodyPr/>
@@ -18095,7 +18467,7 @@
                     <a:p>
                       <a:pPr algn="l"/>
                       <a:r>
-                        <a:rPr sz="1400" b="1">
+                        <a:rPr sz="1200" b="0">
                           <a:solidFill>
                             <a:srgbClr val="2B2B2B"/>
                           </a:solidFill>
@@ -18103,11 +18475,11 @@
                           <a:ea typeface="Noto Sans JP"/>
                           <a:cs typeface="Noto Sans JP"/>
                         </a:rPr>
-                        <a:t>集客顧問「ミチスジ」相談プラン</a:t>
+                        <a:t>SNS・広告</a:t>
                       </a:r>
                     </a:p>
                   </a:txBody>
-                  <a:tcPr anchor="ctr" marL="180000" marR="180000">
+                  <a:tcPr anchor="ctr" marL="150000" marR="150000" marT="30000" marB="30000">
                     <a:solidFill>
                       <a:srgbClr val="FFFFFF"/>
                     </a:solidFill>
@@ -18128,11 +18500,11 @@
                           <a:ea typeface="Noto Sans JP"/>
                           <a:cs typeface="Noto Sans JP"/>
                         </a:rPr>
-                        <a:t>最大2時間のZoom相談で、添削と対応方針をご提案</a:t>
+                        <a:t>公式LINE構築＋運用（配信代行含む）</a:t>
                       </a:r>
                     </a:p>
                   </a:txBody>
-                  <a:tcPr anchor="ctr" marL="180000" marR="180000">
+                  <a:tcPr anchor="ctr" marL="150000" marR="150000" marT="30000" marB="30000">
                     <a:solidFill>
                       <a:srgbClr val="FFFFFF"/>
                     </a:solidFill>
@@ -18145,7 +18517,7 @@
                     <a:p>
                       <a:pPr algn="r"/>
                       <a:r>
-                        <a:rPr sz="1400" b="1">
+                        <a:rPr sz="1200" b="1">
                           <a:solidFill>
                             <a:srgbClr val="C6A15B"/>
                           </a:solidFill>
@@ -18153,18 +18525,18 @@
                           <a:ea typeface="Noto Sans JP"/>
                           <a:cs typeface="Noto Sans JP"/>
                         </a:rPr>
-                        <a:t>1回 14,800円〜</a:t>
+                        <a:t>初月50,000円〜／月額30,000円〜</a:t>
                       </a:r>
                     </a:p>
                   </a:txBody>
-                  <a:tcPr anchor="ctr" marL="180000" marR="180000">
+                  <a:tcPr anchor="ctr" marL="150000" marR="150000" marT="30000" marB="30000">
                     <a:solidFill>
                       <a:srgbClr val="FFFFFF"/>
                     </a:solidFill>
                   </a:tcPr>
                 </a:tc>
               </a:tr>
-              <a:tr h="720000">
+              <a:tr h="400000">
                 <a:tc>
                   <a:txBody>
                     <a:bodyPr/>
@@ -18172,7 +18544,7 @@
                     <a:p>
                       <a:pPr algn="l"/>
                       <a:r>
-                        <a:rPr sz="1400" b="1">
+                        <a:rPr sz="1200" b="0">
                           <a:solidFill>
                             <a:srgbClr val="2B2B2B"/>
                           </a:solidFill>
@@ -18180,11 +18552,11 @@
                           <a:ea typeface="Noto Sans JP"/>
                           <a:cs typeface="Noto Sans JP"/>
                         </a:rPr>
-                        <a:t>集客顧問「ミチスジ」提案プラン</a:t>
+                        <a:t>SNS・広告</a:t>
                       </a:r>
                     </a:p>
                   </a:txBody>
-                  <a:tcPr anchor="ctr" marL="180000" marR="180000">
+                  <a:tcPr anchor="ctr" marL="150000" marR="150000" marT="30000" marB="30000">
                     <a:solidFill>
                       <a:srgbClr val="F7F3EA"/>
                     </a:solidFill>
@@ -18205,11 +18577,11 @@
                           <a:ea typeface="Noto Sans JP"/>
                           <a:cs typeface="Noto Sans JP"/>
                         </a:rPr>
-                        <a:t>現状分析と、必要な施策をまとめた提案書の作成・プレゼン</a:t>
+                        <a:t>Meta広告運用（Facebook／Instagram）</a:t>
                       </a:r>
                     </a:p>
                   </a:txBody>
-                  <a:tcPr anchor="ctr" marL="180000" marR="180000">
+                  <a:tcPr anchor="ctr" marL="150000" marR="150000" marT="30000" marB="30000">
                     <a:solidFill>
                       <a:srgbClr val="F7F3EA"/>
                     </a:solidFill>
@@ -18222,7 +18594,7 @@
                     <a:p>
                       <a:pPr algn="r"/>
                       <a:r>
-                        <a:rPr sz="1400" b="1">
+                        <a:rPr sz="1200" b="1">
                           <a:solidFill>
                             <a:srgbClr val="C6A15B"/>
                           </a:solidFill>
@@ -18230,11 +18602,165 @@
                           <a:ea typeface="Noto Sans JP"/>
                           <a:cs typeface="Noto Sans JP"/>
                         </a:rPr>
-                        <a:t>単発 49,800円〜</a:t>
+                        <a:t>初期30,000円〜／月額 広告費の20%</a:t>
                       </a:r>
                     </a:p>
                   </a:txBody>
-                  <a:tcPr anchor="ctr" marL="180000" marR="180000">
+                  <a:tcPr anchor="ctr" marL="150000" marR="150000" marT="30000" marB="30000">
+                    <a:solidFill>
+                      <a:srgbClr val="F7F3EA"/>
+                    </a:solidFill>
+                  </a:tcPr>
+                </a:tc>
+              </a:tr>
+              <a:tr h="400000">
+                <a:tc>
+                  <a:txBody>
+                    <a:bodyPr/>
+                    <a:lstStyle/>
+                    <a:p>
+                      <a:pPr algn="l"/>
+                      <a:r>
+                        <a:rPr sz="1200" b="0">
+                          <a:solidFill>
+                            <a:srgbClr val="2B2B2B"/>
+                          </a:solidFill>
+                          <a:latin typeface="Noto Sans JP"/>
+                          <a:ea typeface="Noto Sans JP"/>
+                          <a:cs typeface="Noto Sans JP"/>
+                        </a:rPr>
+                        <a:t>紙媒体</a:t>
+                      </a:r>
+                    </a:p>
+                  </a:txBody>
+                  <a:tcPr anchor="ctr" marL="150000" marR="150000" marT="30000" marB="30000">
+                    <a:solidFill>
+                      <a:srgbClr val="FFFFFF"/>
+                    </a:solidFill>
+                  </a:tcPr>
+                </a:tc>
+                <a:tc>
+                  <a:txBody>
+                    <a:bodyPr/>
+                    <a:lstStyle/>
+                    <a:p>
+                      <a:pPr algn="l"/>
+                      <a:r>
+                        <a:rPr sz="1200" b="0">
+                          <a:solidFill>
+                            <a:srgbClr val="2B2B2B"/>
+                          </a:solidFill>
+                          <a:latin typeface="Noto Sans JP"/>
+                          <a:ea typeface="Noto Sans JP"/>
+                          <a:cs typeface="Noto Sans JP"/>
+                        </a:rPr>
+                        <a:t>チラシ制作（片面／両面）</a:t>
+                      </a:r>
+                    </a:p>
+                  </a:txBody>
+                  <a:tcPr anchor="ctr" marL="150000" marR="150000" marT="30000" marB="30000">
+                    <a:solidFill>
+                      <a:srgbClr val="FFFFFF"/>
+                    </a:solidFill>
+                  </a:tcPr>
+                </a:tc>
+                <a:tc>
+                  <a:txBody>
+                    <a:bodyPr/>
+                    <a:lstStyle/>
+                    <a:p>
+                      <a:pPr algn="r"/>
+                      <a:r>
+                        <a:rPr sz="1200" b="1">
+                          <a:solidFill>
+                            <a:srgbClr val="C6A15B"/>
+                          </a:solidFill>
+                          <a:latin typeface="Noto Sans JP"/>
+                          <a:ea typeface="Noto Sans JP"/>
+                          <a:cs typeface="Noto Sans JP"/>
+                        </a:rPr>
+                        <a:t>30,000円〜／50,000円〜</a:t>
+                      </a:r>
+                    </a:p>
+                  </a:txBody>
+                  <a:tcPr anchor="ctr" marL="150000" marR="150000" marT="30000" marB="30000">
+                    <a:solidFill>
+                      <a:srgbClr val="FFFFFF"/>
+                    </a:solidFill>
+                  </a:tcPr>
+                </a:tc>
+              </a:tr>
+              <a:tr h="400000">
+                <a:tc>
+                  <a:txBody>
+                    <a:bodyPr/>
+                    <a:lstStyle/>
+                    <a:p>
+                      <a:pPr algn="l"/>
+                      <a:r>
+                        <a:rPr sz="1200" b="0">
+                          <a:solidFill>
+                            <a:srgbClr val="2B2B2B"/>
+                          </a:solidFill>
+                          <a:latin typeface="Noto Sans JP"/>
+                          <a:ea typeface="Noto Sans JP"/>
+                          <a:cs typeface="Noto Sans JP"/>
+                        </a:rPr>
+                        <a:t>その他</a:t>
+                      </a:r>
+                    </a:p>
+                  </a:txBody>
+                  <a:tcPr anchor="ctr" marL="150000" marR="150000" marT="30000" marB="30000">
+                    <a:solidFill>
+                      <a:srgbClr val="F7F3EA"/>
+                    </a:solidFill>
+                  </a:tcPr>
+                </a:tc>
+                <a:tc>
+                  <a:txBody>
+                    <a:bodyPr/>
+                    <a:lstStyle/>
+                    <a:p>
+                      <a:pPr algn="l"/>
+                      <a:r>
+                        <a:rPr sz="1200" b="0">
+                          <a:solidFill>
+                            <a:srgbClr val="2B2B2B"/>
+                          </a:solidFill>
+                          <a:latin typeface="Noto Sans JP"/>
+                          <a:ea typeface="Noto Sans JP"/>
+                          <a:cs typeface="Noto Sans JP"/>
+                        </a:rPr>
+                        <a:t>スピーチ原稿／営業資料</a:t>
+                      </a:r>
+                    </a:p>
+                  </a:txBody>
+                  <a:tcPr anchor="ctr" marL="150000" marR="150000" marT="30000" marB="30000">
+                    <a:solidFill>
+                      <a:srgbClr val="F7F3EA"/>
+                    </a:solidFill>
+                  </a:tcPr>
+                </a:tc>
+                <a:tc>
+                  <a:txBody>
+                    <a:bodyPr/>
+                    <a:lstStyle/>
+                    <a:p>
+                      <a:pPr algn="r"/>
+                      <a:r>
+                        <a:rPr sz="1200" b="1">
+                          <a:solidFill>
+                            <a:srgbClr val="C6A15B"/>
+                          </a:solidFill>
+                          <a:latin typeface="Noto Sans JP"/>
+                          <a:ea typeface="Noto Sans JP"/>
+                          <a:cs typeface="Noto Sans JP"/>
+                        </a:rPr>
+                        <a:t>5,000円〜／50,000円〜</a:t>
+                      </a:r>
+                    </a:p>
+                  </a:txBody>
+                  <a:tcPr anchor="ctr" marL="150000" marR="150000" marT="30000" marB="30000">
                     <a:solidFill>
                       <a:srgbClr val="F7F3EA"/>
                     </a:solidFill>
@@ -18247,85 +18773,41 @@
       </p:graphicFrame>
       <p:sp>
         <p:nvSpPr>
-          <p:cNvPr id="9" name="Rectangle 8"/>
-          <p:cNvSpPr/>
-          <p:nvPr/>
-        </p:nvSpPr>
-        <p:spPr>
-          <a:xfrm>
-            <a:off x="762000" y="5550000"/>
-            <a:ext cx="10668000" cy="600000"/>
-          </a:xfrm>
-          <a:prstGeom prst="rect">
-            <a:avLst/>
-          </a:prstGeom>
-          <a:solidFill>
-            <a:srgbClr val="F7F3EA"/>
-          </a:solidFill>
-          <a:ln>
-            <a:noFill/>
-          </a:ln>
-          <a:effectLst/>
-        </p:spPr>
-        <p:style>
-          <a:lnRef idx="1">
-            <a:schemeClr val="accent1"/>
-          </a:lnRef>
-          <a:fillRef idx="3">
-            <a:schemeClr val="accent1"/>
-          </a:fillRef>
-          <a:effectRef idx="2">
-            <a:schemeClr val="accent1"/>
-          </a:effectRef>
-          <a:fontRef idx="minor">
-            <a:schemeClr val="lt1"/>
-          </a:fontRef>
-        </p:style>
-        <p:txBody>
-          <a:bodyPr rtlCol="0" anchor="ctr"/>
-          <a:lstStyle/>
-          <a:p>
-            <a:pPr algn="ctr"/>
-          </a:p>
-        </p:txBody>
-      </p:sp>
-      <p:sp>
-        <p:nvSpPr>
-          <p:cNvPr id="10" name="TextBox 9"/>
-          <p:cNvSpPr txBox="1"/>
-          <p:nvPr/>
-        </p:nvSpPr>
-        <p:spPr>
-          <a:xfrm>
-            <a:off x="762000" y="5550000"/>
-            <a:ext cx="10668000" cy="600000"/>
-          </a:xfrm>
-          <a:prstGeom prst="rect">
-            <a:avLst/>
-          </a:prstGeom>
-          <a:noFill/>
-        </p:spPr>
-        <p:txBody>
-          <a:bodyPr wrap="square" anchor="ctr" lIns="0" rIns="0" tIns="0" bIns="0">
-            <a:spAutoFit/>
-          </a:bodyPr>
-          <a:lstStyle/>
-          <a:p>
-            <a:pPr algn="ctr">
+          <p:cNvPr id="21" name="TextBox 20"/>
+          <p:cNvSpPr txBox="1"/>
+          <p:nvPr/>
+        </p:nvSpPr>
+        <p:spPr>
+          <a:xfrm>
+            <a:off x="762000" y="6080000"/>
+            <a:ext cx="10668000" cy="300000"/>
+          </a:xfrm>
+          <a:prstGeom prst="rect">
+            <a:avLst/>
+          </a:prstGeom>
+          <a:noFill/>
+        </p:spPr>
+        <p:txBody>
+          <a:bodyPr wrap="square" anchor="t" lIns="0" rIns="0" tIns="0" bIns="0">
+            <a:spAutoFit/>
+          </a:bodyPr>
+          <a:lstStyle/>
+          <a:p>
+            <a:pPr algn="l">
               <a:lnSpc>
                 <a:spcPct val="125000"/>
               </a:lnSpc>
             </a:pPr>
             <a:r>
-              <a:rPr sz="1300" b="1">
-                <a:solidFill>
-                  <a:srgbClr val="2B2B2B"/>
-                </a:solidFill>
-                <a:latin typeface="Noto Sans JP"/>
-                <a:ea typeface="Noto Sans JP"/>
-                <a:cs typeface="Noto Sans JP"/>
-              </a:rPr>
-              <a:t>「ミチスジ」顧問プランの契約中は、制作代行「カワリミ」の費用が 20% OFF になります。</a:t>
+              <a:rPr sz="900" b="0">
+                <a:solidFill>
+                  <a:srgbClr val="5E5E5E"/>
+                </a:solidFill>
+                <a:latin typeface="Noto Sans JP"/>
+                <a:ea typeface="Noto Sans JP"/>
+                <a:cs typeface="Noto Sans JP"/>
+              </a:rPr>
+              <a:t>※ 価格は税込・目安です。内容やボリュームに応じて事前にお見積りします。「ミチスジ」顧問プラン契約中は、制作代行の費用が20% OFF。</a:t>
             </a:r>
           </a:p>
         </p:txBody>
@@ -23570,7 +24052,7 @@
                 <a:ea typeface="Noto Sans JP"/>
                 <a:cs typeface="Noto Sans JP"/>
               </a:rPr>
-              <a:t>KAWARIMI</a:t>
+              <a:t>MICHISUJI</a:t>
             </a:r>
           </a:p>
         </p:txBody>
@@ -23611,7 +24093,7 @@
                 <a:ea typeface="Noto Sans JP"/>
                 <a:cs typeface="Noto Sans JP"/>
               </a:rPr>
-              <a:t>制作代行「カワリミ」― あなたの代わりに、作って運用します</a:t>
+              <a:t>集客顧問「ミチスジ」― 迷子にならない道筋を、一緒に</a:t>
             </a:r>
           </a:p>
         </p:txBody>
@@ -23750,14 +24232,14 @@
         </p:nvSpPr>
         <p:spPr>
           <a:xfrm>
-            <a:off x="762000" y="1700000"/>
-            <a:ext cx="3400000" cy="1950000"/>
+            <a:off x="762000" y="2300000"/>
+            <a:ext cx="3400000" cy="3850000"/>
           </a:xfrm>
           <a:prstGeom prst="rect">
             <a:avLst/>
           </a:prstGeom>
           <a:solidFill>
-            <a:srgbClr val="FFFFFF"/>
+            <a:srgbClr val="F7F3EA"/>
           </a:solidFill>
           <a:ln w="12700">
             <a:solidFill>
@@ -23790,187 +24272,302 @@
       </p:sp>
       <p:sp>
         <p:nvSpPr>
-          <p:cNvPr id="9" name="Rectangle 8"/>
+          <p:cNvPr id="9" name="TextBox 8"/>
+          <p:cNvSpPr txBox="1"/>
+          <p:nvPr/>
+        </p:nvSpPr>
+        <p:spPr>
+          <a:xfrm>
+            <a:off x="1012000" y="2530000"/>
+            <a:ext cx="2900000" cy="300000"/>
+          </a:xfrm>
+          <a:prstGeom prst="rect">
+            <a:avLst/>
+          </a:prstGeom>
+          <a:noFill/>
+        </p:spPr>
+        <p:txBody>
+          <a:bodyPr wrap="square" anchor="t" lIns="0" rIns="0" tIns="0" bIns="0">
+            <a:spAutoFit/>
+          </a:bodyPr>
+          <a:lstStyle/>
+          <a:p>
+            <a:pPr algn="l">
+              <a:lnSpc>
+                <a:spcPct val="125000"/>
+              </a:lnSpc>
+            </a:pPr>
+            <a:r>
+              <a:rPr sz="1100" b="1">
+                <a:solidFill>
+                  <a:srgbClr val="C6A15B"/>
+                </a:solidFill>
+                <a:latin typeface="Noto Sans JP"/>
+                <a:ea typeface="Noto Sans JP"/>
+                <a:cs typeface="Noto Sans JP"/>
+              </a:rPr>
+              <a:t>STEP 1</a:t>
+            </a:r>
+          </a:p>
+        </p:txBody>
+      </p:sp>
+      <p:sp>
+        <p:nvSpPr>
+          <p:cNvPr id="10" name="TextBox 9"/>
+          <p:cNvSpPr txBox="1"/>
+          <p:nvPr/>
+        </p:nvSpPr>
+        <p:spPr>
+          <a:xfrm>
+            <a:off x="1012000" y="2820000"/>
+            <a:ext cx="2900000" cy="450000"/>
+          </a:xfrm>
+          <a:prstGeom prst="rect">
+            <a:avLst/>
+          </a:prstGeom>
+          <a:noFill/>
+        </p:spPr>
+        <p:txBody>
+          <a:bodyPr wrap="square" anchor="t" lIns="0" rIns="0" tIns="0" bIns="0">
+            <a:spAutoFit/>
+          </a:bodyPr>
+          <a:lstStyle/>
+          <a:p>
+            <a:pPr algn="l">
+              <a:lnSpc>
+                <a:spcPct val="125000"/>
+              </a:lnSpc>
+            </a:pPr>
+            <a:r>
+              <a:rPr sz="2000" b="1">
+                <a:solidFill>
+                  <a:srgbClr val="2B2B2B"/>
+                </a:solidFill>
+                <a:latin typeface="Noto Sans JP"/>
+                <a:ea typeface="Noto Sans JP"/>
+                <a:cs typeface="Noto Sans JP"/>
+              </a:rPr>
+              <a:t>相談プラン</a:t>
+            </a:r>
+          </a:p>
+        </p:txBody>
+      </p:sp>
+      <p:sp>
+        <p:nvSpPr>
+          <p:cNvPr id="11" name="TextBox 10"/>
+          <p:cNvSpPr txBox="1"/>
+          <p:nvPr/>
+        </p:nvSpPr>
+        <p:spPr>
+          <a:xfrm>
+            <a:off x="1012000" y="3350000"/>
+            <a:ext cx="2900000" cy="500000"/>
+          </a:xfrm>
+          <a:prstGeom prst="rect">
+            <a:avLst/>
+          </a:prstGeom>
+          <a:noFill/>
+        </p:spPr>
+        <p:txBody>
+          <a:bodyPr wrap="square" anchor="t" lIns="0" rIns="0" tIns="0" bIns="0">
+            <a:spAutoFit/>
+          </a:bodyPr>
+          <a:lstStyle/>
+          <a:p>
+            <a:pPr algn="l">
+              <a:lnSpc>
+                <a:spcPct val="125000"/>
+              </a:lnSpc>
+            </a:pPr>
+            <a:r>
+              <a:rPr sz="1100" b="0">
+                <a:solidFill>
+                  <a:srgbClr val="5E5E5E"/>
+                </a:solidFill>
+                <a:latin typeface="Noto Sans JP"/>
+                <a:ea typeface="Noto Sans JP"/>
+                <a:cs typeface="Noto Sans JP"/>
+              </a:rPr>
+              <a:t>1回限り  </a:t>
+            </a:r>
+          </a:p>
+        </p:txBody>
+      </p:sp>
+      <p:sp>
+        <p:nvSpPr>
+          <p:cNvPr id="12" name="TextBox 11"/>
+          <p:cNvSpPr txBox="1"/>
+          <p:nvPr/>
+        </p:nvSpPr>
+        <p:spPr>
+          <a:xfrm>
+            <a:off x="1662000" y="3260000"/>
+            <a:ext cx="2250000" cy="500000"/>
+          </a:xfrm>
+          <a:prstGeom prst="rect">
+            <a:avLst/>
+          </a:prstGeom>
+          <a:noFill/>
+        </p:spPr>
+        <p:txBody>
+          <a:bodyPr wrap="square" anchor="t" lIns="0" rIns="0" tIns="0" bIns="0">
+            <a:spAutoFit/>
+          </a:bodyPr>
+          <a:lstStyle/>
+          <a:p>
+            <a:pPr algn="l">
+              <a:lnSpc>
+                <a:spcPct val="125000"/>
+              </a:lnSpc>
+            </a:pPr>
+            <a:r>
+              <a:rPr sz="2000" b="1">
+                <a:solidFill>
+                  <a:srgbClr val="C6A15B"/>
+                </a:solidFill>
+                <a:latin typeface="Noto Sans JP"/>
+                <a:ea typeface="Noto Sans JP"/>
+                <a:cs typeface="Noto Sans JP"/>
+              </a:rPr>
+              <a:t>14,800円〜</a:t>
+            </a:r>
+          </a:p>
+        </p:txBody>
+      </p:sp>
+      <p:sp>
+        <p:nvSpPr>
+          <p:cNvPr id="13" name="TextBox 12"/>
+          <p:cNvSpPr txBox="1"/>
+          <p:nvPr/>
+        </p:nvSpPr>
+        <p:spPr>
+          <a:xfrm>
+            <a:off x="1012000" y="3900000"/>
+            <a:ext cx="2900000" cy="1700000"/>
+          </a:xfrm>
+          <a:prstGeom prst="rect">
+            <a:avLst/>
+          </a:prstGeom>
+          <a:noFill/>
+        </p:spPr>
+        <p:txBody>
+          <a:bodyPr wrap="square" anchor="t" lIns="0" rIns="0" tIns="0" bIns="0">
+            <a:spAutoFit/>
+          </a:bodyPr>
+          <a:lstStyle/>
+          <a:p>
+            <a:pPr algn="l">
+              <a:lnSpc>
+                <a:spcPct val="150000"/>
+              </a:lnSpc>
+            </a:pPr>
+            <a:r>
+              <a:rPr sz="1200" b="0">
+                <a:solidFill>
+                  <a:srgbClr val="2B2B2B"/>
+                </a:solidFill>
+                <a:latin typeface="Noto Sans JP"/>
+                <a:ea typeface="Noto Sans JP"/>
+                <a:cs typeface="Noto Sans JP"/>
+              </a:rPr>
+              <a:t>・最大2時間のZoom相談</a:t>
+            </a:r>
+          </a:p>
+          <a:p>
+            <a:pPr algn="l">
+              <a:lnSpc>
+                <a:spcPct val="150000"/>
+              </a:lnSpc>
+            </a:pPr>
+            <a:r>
+              <a:rPr sz="1200" b="0">
+                <a:solidFill>
+                  <a:srgbClr val="2B2B2B"/>
+                </a:solidFill>
+                <a:latin typeface="Noto Sans JP"/>
+                <a:ea typeface="Noto Sans JP"/>
+                <a:cs typeface="Noto Sans JP"/>
+              </a:rPr>
+              <a:t>・現状の広告物を添削</a:t>
+            </a:r>
+          </a:p>
+          <a:p>
+            <a:pPr algn="l">
+              <a:lnSpc>
+                <a:spcPct val="150000"/>
+              </a:lnSpc>
+            </a:pPr>
+            <a:r>
+              <a:rPr sz="1200" b="0">
+                <a:solidFill>
+                  <a:srgbClr val="2B2B2B"/>
+                </a:solidFill>
+                <a:latin typeface="Noto Sans JP"/>
+                <a:ea typeface="Noto Sans JP"/>
+                <a:cs typeface="Noto Sans JP"/>
+              </a:rPr>
+              <a:t>・まず何から手をつけるか、優先順位をご提案</a:t>
+            </a:r>
+          </a:p>
+        </p:txBody>
+      </p:sp>
+      <p:sp>
+        <p:nvSpPr>
+          <p:cNvPr id="14" name="TextBox 13"/>
+          <p:cNvSpPr txBox="1"/>
+          <p:nvPr/>
+        </p:nvSpPr>
+        <p:spPr>
+          <a:xfrm>
+            <a:off x="1012000" y="5700000"/>
+            <a:ext cx="2900000" cy="300000"/>
+          </a:xfrm>
+          <a:prstGeom prst="rect">
+            <a:avLst/>
+          </a:prstGeom>
+          <a:noFill/>
+        </p:spPr>
+        <p:txBody>
+          <a:bodyPr wrap="square" anchor="t" lIns="0" rIns="0" tIns="0" bIns="0">
+            <a:spAutoFit/>
+          </a:bodyPr>
+          <a:lstStyle/>
+          <a:p>
+            <a:pPr algn="l">
+              <a:lnSpc>
+                <a:spcPct val="125000"/>
+              </a:lnSpc>
+            </a:pPr>
+            <a:r>
+              <a:rPr sz="1100" b="1">
+                <a:solidFill>
+                  <a:srgbClr val="5E5E5E"/>
+                </a:solidFill>
+                <a:latin typeface="Noto Sans JP"/>
+                <a:ea typeface="Noto Sans JP"/>
+                <a:cs typeface="Noto Sans JP"/>
+              </a:rPr>
+              <a:t>→ まず1回、現状を整理したい方</a:t>
+            </a:r>
+          </a:p>
+        </p:txBody>
+      </p:sp>
+      <p:sp>
+        <p:nvSpPr>
+          <p:cNvPr id="15" name="Rectangle 14"/>
           <p:cNvSpPr/>
           <p:nvPr/>
         </p:nvSpPr>
         <p:spPr>
           <a:xfrm>
-            <a:off x="762000" y="1700000"/>
-            <a:ext cx="3400000" cy="50800"/>
+            <a:off x="4396000" y="2050000"/>
+            <a:ext cx="3400000" cy="4100000"/>
           </a:xfrm>
           <a:prstGeom prst="rect">
             <a:avLst/>
           </a:prstGeom>
           <a:solidFill>
-            <a:srgbClr val="2B2B2B"/>
-          </a:solidFill>
-          <a:ln>
-            <a:noFill/>
-          </a:ln>
-          <a:effectLst/>
-        </p:spPr>
-        <p:style>
-          <a:lnRef idx="1">
-            <a:schemeClr val="accent1"/>
-          </a:lnRef>
-          <a:fillRef idx="3">
-            <a:schemeClr val="accent1"/>
-          </a:fillRef>
-          <a:effectRef idx="2">
-            <a:schemeClr val="accent1"/>
-          </a:effectRef>
-          <a:fontRef idx="minor">
-            <a:schemeClr val="lt1"/>
-          </a:fontRef>
-        </p:style>
-        <p:txBody>
-          <a:bodyPr rtlCol="0" anchor="ctr"/>
-          <a:lstStyle/>
-          <a:p>
-            <a:pPr algn="ctr"/>
-          </a:p>
-        </p:txBody>
-      </p:sp>
-      <p:sp>
-        <p:nvSpPr>
-          <p:cNvPr id="10" name="TextBox 9"/>
-          <p:cNvSpPr txBox="1"/>
-          <p:nvPr/>
-        </p:nvSpPr>
-        <p:spPr>
-          <a:xfrm>
-            <a:off x="1012000" y="1950000"/>
-            <a:ext cx="2900000" cy="400000"/>
-          </a:xfrm>
-          <a:prstGeom prst="rect">
-            <a:avLst/>
-          </a:prstGeom>
-          <a:noFill/>
-        </p:spPr>
-        <p:txBody>
-          <a:bodyPr wrap="square" anchor="t" lIns="0" rIns="0" tIns="0" bIns="0">
-            <a:spAutoFit/>
-          </a:bodyPr>
-          <a:lstStyle/>
-          <a:p>
-            <a:pPr algn="l">
-              <a:lnSpc>
-                <a:spcPct val="125000"/>
-              </a:lnSpc>
-            </a:pPr>
-            <a:r>
-              <a:rPr sz="1500" b="1">
-                <a:solidFill>
-                  <a:srgbClr val="2B2B2B"/>
-                </a:solidFill>
-                <a:latin typeface="Noto Sans JP"/>
-                <a:ea typeface="Noto Sans JP"/>
-                <a:cs typeface="Noto Sans JP"/>
-              </a:rPr>
-              <a:t>Webページ制作（LP・HP）</a:t>
-            </a:r>
-          </a:p>
-        </p:txBody>
-      </p:sp>
-      <p:sp>
-        <p:nvSpPr>
-          <p:cNvPr id="11" name="TextBox 10"/>
-          <p:cNvSpPr txBox="1"/>
-          <p:nvPr/>
-        </p:nvSpPr>
-        <p:spPr>
-          <a:xfrm>
-            <a:off x="1012000" y="2420000"/>
-            <a:ext cx="2900000" cy="700000"/>
-          </a:xfrm>
-          <a:prstGeom prst="rect">
-            <a:avLst/>
-          </a:prstGeom>
-          <a:noFill/>
-        </p:spPr>
-        <p:txBody>
-          <a:bodyPr wrap="square" anchor="t" lIns="0" rIns="0" tIns="0" bIns="0">
-            <a:spAutoFit/>
-          </a:bodyPr>
-          <a:lstStyle/>
-          <a:p>
-            <a:pPr algn="l">
-              <a:lnSpc>
-                <a:spcPct val="120000"/>
-              </a:lnSpc>
-            </a:pPr>
-            <a:r>
-              <a:rPr sz="1500" b="1">
-                <a:solidFill>
-                  <a:srgbClr val="C6A15B"/>
-                </a:solidFill>
-                <a:latin typeface="Noto Sans JP"/>
-                <a:ea typeface="Noto Sans JP"/>
-                <a:cs typeface="Noto Sans JP"/>
-              </a:rPr>
-              <a:t>100,000円〜</a:t>
-            </a:r>
-          </a:p>
-        </p:txBody>
-      </p:sp>
-      <p:sp>
-        <p:nvSpPr>
-          <p:cNvPr id="12" name="TextBox 11"/>
-          <p:cNvSpPr txBox="1"/>
-          <p:nvPr/>
-        </p:nvSpPr>
-        <p:spPr>
-          <a:xfrm>
-            <a:off x="1012000" y="3230000"/>
-            <a:ext cx="2900000" cy="300000"/>
-          </a:xfrm>
-          <a:prstGeom prst="rect">
-            <a:avLst/>
-          </a:prstGeom>
-          <a:noFill/>
-        </p:spPr>
-        <p:txBody>
-          <a:bodyPr wrap="square" anchor="t" lIns="0" rIns="0" tIns="0" bIns="0">
-            <a:spAutoFit/>
-          </a:bodyPr>
-          <a:lstStyle/>
-          <a:p>
-            <a:pPr algn="l">
-              <a:lnSpc>
-                <a:spcPct val="125000"/>
-              </a:lnSpc>
-            </a:pPr>
-            <a:r>
-              <a:rPr sz="1000" b="0">
-                <a:solidFill>
-                  <a:srgbClr val="5E5E5E"/>
-                </a:solidFill>
-                <a:latin typeface="Noto Sans JP"/>
-                <a:ea typeface="Noto Sans JP"/>
-                <a:cs typeface="Noto Sans JP"/>
-              </a:rPr>
-              <a:t>構成・ライティングから実装まで</a:t>
-            </a:r>
-          </a:p>
-        </p:txBody>
-      </p:sp>
-      <p:sp>
-        <p:nvSpPr>
-          <p:cNvPr id="13" name="Rectangle 12"/>
-          <p:cNvSpPr/>
-          <p:nvPr/>
-        </p:nvSpPr>
-        <p:spPr>
-          <a:xfrm>
-            <a:off x="4396000" y="1700000"/>
-            <a:ext cx="3400000" cy="1950000"/>
-          </a:xfrm>
-          <a:prstGeom prst="rect">
-            <a:avLst/>
-          </a:prstGeom>
-          <a:solidFill>
-            <a:srgbClr val="FFFFFF"/>
+            <a:srgbClr val="F7F3EA"/>
           </a:solidFill>
           <a:ln w="12700">
             <a:solidFill>
@@ -24003,23 +24600,307 @@
       </p:sp>
       <p:sp>
         <p:nvSpPr>
-          <p:cNvPr id="14" name="Rectangle 13"/>
+          <p:cNvPr id="16" name="TextBox 15"/>
+          <p:cNvSpPr txBox="1"/>
+          <p:nvPr/>
+        </p:nvSpPr>
+        <p:spPr>
+          <a:xfrm>
+            <a:off x="4646000" y="2280000"/>
+            <a:ext cx="2900000" cy="300000"/>
+          </a:xfrm>
+          <a:prstGeom prst="rect">
+            <a:avLst/>
+          </a:prstGeom>
+          <a:noFill/>
+        </p:spPr>
+        <p:txBody>
+          <a:bodyPr wrap="square" anchor="t" lIns="0" rIns="0" tIns="0" bIns="0">
+            <a:spAutoFit/>
+          </a:bodyPr>
+          <a:lstStyle/>
+          <a:p>
+            <a:pPr algn="l">
+              <a:lnSpc>
+                <a:spcPct val="125000"/>
+              </a:lnSpc>
+            </a:pPr>
+            <a:r>
+              <a:rPr sz="1100" b="1">
+                <a:solidFill>
+                  <a:srgbClr val="C6A15B"/>
+                </a:solidFill>
+                <a:latin typeface="Noto Sans JP"/>
+                <a:ea typeface="Noto Sans JP"/>
+                <a:cs typeface="Noto Sans JP"/>
+              </a:rPr>
+              <a:t>STEP 2</a:t>
+            </a:r>
+          </a:p>
+        </p:txBody>
+      </p:sp>
+      <p:sp>
+        <p:nvSpPr>
+          <p:cNvPr id="17" name="TextBox 16"/>
+          <p:cNvSpPr txBox="1"/>
+          <p:nvPr/>
+        </p:nvSpPr>
+        <p:spPr>
+          <a:xfrm>
+            <a:off x="4646000" y="2570000"/>
+            <a:ext cx="2900000" cy="450000"/>
+          </a:xfrm>
+          <a:prstGeom prst="rect">
+            <a:avLst/>
+          </a:prstGeom>
+          <a:noFill/>
+        </p:spPr>
+        <p:txBody>
+          <a:bodyPr wrap="square" anchor="t" lIns="0" rIns="0" tIns="0" bIns="0">
+            <a:spAutoFit/>
+          </a:bodyPr>
+          <a:lstStyle/>
+          <a:p>
+            <a:pPr algn="l">
+              <a:lnSpc>
+                <a:spcPct val="125000"/>
+              </a:lnSpc>
+            </a:pPr>
+            <a:r>
+              <a:rPr sz="2000" b="1">
+                <a:solidFill>
+                  <a:srgbClr val="2B2B2B"/>
+                </a:solidFill>
+                <a:latin typeface="Noto Sans JP"/>
+                <a:ea typeface="Noto Sans JP"/>
+                <a:cs typeface="Noto Sans JP"/>
+              </a:rPr>
+              <a:t>提案プラン</a:t>
+            </a:r>
+          </a:p>
+        </p:txBody>
+      </p:sp>
+      <p:sp>
+        <p:nvSpPr>
+          <p:cNvPr id="18" name="TextBox 17"/>
+          <p:cNvSpPr txBox="1"/>
+          <p:nvPr/>
+        </p:nvSpPr>
+        <p:spPr>
+          <a:xfrm>
+            <a:off x="4646000" y="3100000"/>
+            <a:ext cx="2900000" cy="500000"/>
+          </a:xfrm>
+          <a:prstGeom prst="rect">
+            <a:avLst/>
+          </a:prstGeom>
+          <a:noFill/>
+        </p:spPr>
+        <p:txBody>
+          <a:bodyPr wrap="square" anchor="t" lIns="0" rIns="0" tIns="0" bIns="0">
+            <a:spAutoFit/>
+          </a:bodyPr>
+          <a:lstStyle/>
+          <a:p>
+            <a:pPr algn="l">
+              <a:lnSpc>
+                <a:spcPct val="125000"/>
+              </a:lnSpc>
+            </a:pPr>
+            <a:r>
+              <a:rPr sz="1100" b="0">
+                <a:solidFill>
+                  <a:srgbClr val="5E5E5E"/>
+                </a:solidFill>
+                <a:latin typeface="Noto Sans JP"/>
+                <a:ea typeface="Noto Sans JP"/>
+                <a:cs typeface="Noto Sans JP"/>
+              </a:rPr>
+              <a:t>単発  </a:t>
+            </a:r>
+          </a:p>
+        </p:txBody>
+      </p:sp>
+      <p:sp>
+        <p:nvSpPr>
+          <p:cNvPr id="19" name="TextBox 18"/>
+          <p:cNvSpPr txBox="1"/>
+          <p:nvPr/>
+        </p:nvSpPr>
+        <p:spPr>
+          <a:xfrm>
+            <a:off x="5296000" y="3010000"/>
+            <a:ext cx="2250000" cy="500000"/>
+          </a:xfrm>
+          <a:prstGeom prst="rect">
+            <a:avLst/>
+          </a:prstGeom>
+          <a:noFill/>
+        </p:spPr>
+        <p:txBody>
+          <a:bodyPr wrap="square" anchor="t" lIns="0" rIns="0" tIns="0" bIns="0">
+            <a:spAutoFit/>
+          </a:bodyPr>
+          <a:lstStyle/>
+          <a:p>
+            <a:pPr algn="l">
+              <a:lnSpc>
+                <a:spcPct val="125000"/>
+              </a:lnSpc>
+            </a:pPr>
+            <a:r>
+              <a:rPr sz="2000" b="1">
+                <a:solidFill>
+                  <a:srgbClr val="C6A15B"/>
+                </a:solidFill>
+                <a:latin typeface="Noto Sans JP"/>
+                <a:ea typeface="Noto Sans JP"/>
+                <a:cs typeface="Noto Sans JP"/>
+              </a:rPr>
+              <a:t>49,800円〜</a:t>
+            </a:r>
+          </a:p>
+        </p:txBody>
+      </p:sp>
+      <p:sp>
+        <p:nvSpPr>
+          <p:cNvPr id="20" name="TextBox 19"/>
+          <p:cNvSpPr txBox="1"/>
+          <p:nvPr/>
+        </p:nvSpPr>
+        <p:spPr>
+          <a:xfrm>
+            <a:off x="4646000" y="3650000"/>
+            <a:ext cx="2900000" cy="1700000"/>
+          </a:xfrm>
+          <a:prstGeom prst="rect">
+            <a:avLst/>
+          </a:prstGeom>
+          <a:noFill/>
+        </p:spPr>
+        <p:txBody>
+          <a:bodyPr wrap="square" anchor="t" lIns="0" rIns="0" tIns="0" bIns="0">
+            <a:spAutoFit/>
+          </a:bodyPr>
+          <a:lstStyle/>
+          <a:p>
+            <a:pPr algn="l">
+              <a:lnSpc>
+                <a:spcPct val="150000"/>
+              </a:lnSpc>
+            </a:pPr>
+            <a:r>
+              <a:rPr sz="1200" b="0">
+                <a:solidFill>
+                  <a:srgbClr val="2B2B2B"/>
+                </a:solidFill>
+                <a:latin typeface="Noto Sans JP"/>
+                <a:ea typeface="Noto Sans JP"/>
+                <a:cs typeface="Noto Sans JP"/>
+              </a:rPr>
+              <a:t>・現状分析・競合リサーチ</a:t>
+            </a:r>
+          </a:p>
+          <a:p>
+            <a:pPr algn="l">
+              <a:lnSpc>
+                <a:spcPct val="150000"/>
+              </a:lnSpc>
+            </a:pPr>
+            <a:r>
+              <a:rPr sz="1200" b="0">
+                <a:solidFill>
+                  <a:srgbClr val="2B2B2B"/>
+                </a:solidFill>
+                <a:latin typeface="Noto Sans JP"/>
+                <a:ea typeface="Noto Sans JP"/>
+                <a:cs typeface="Noto Sans JP"/>
+              </a:rPr>
+              <a:t>・具体的な施策の提案書を作成</a:t>
+            </a:r>
+          </a:p>
+          <a:p>
+            <a:pPr algn="l">
+              <a:lnSpc>
+                <a:spcPct val="150000"/>
+              </a:lnSpc>
+            </a:pPr>
+            <a:r>
+              <a:rPr sz="1200" b="0">
+                <a:solidFill>
+                  <a:srgbClr val="2B2B2B"/>
+                </a:solidFill>
+                <a:latin typeface="Noto Sans JP"/>
+                <a:ea typeface="Noto Sans JP"/>
+                <a:cs typeface="Noto Sans JP"/>
+              </a:rPr>
+              <a:t>・提案プレゼン・質疑応答</a:t>
+            </a:r>
+          </a:p>
+        </p:txBody>
+      </p:sp>
+      <p:sp>
+        <p:nvSpPr>
+          <p:cNvPr id="21" name="TextBox 20"/>
+          <p:cNvSpPr txBox="1"/>
+          <p:nvPr/>
+        </p:nvSpPr>
+        <p:spPr>
+          <a:xfrm>
+            <a:off x="4646000" y="5700000"/>
+            <a:ext cx="2900000" cy="300000"/>
+          </a:xfrm>
+          <a:prstGeom prst="rect">
+            <a:avLst/>
+          </a:prstGeom>
+          <a:noFill/>
+        </p:spPr>
+        <p:txBody>
+          <a:bodyPr wrap="square" anchor="t" lIns="0" rIns="0" tIns="0" bIns="0">
+            <a:spAutoFit/>
+          </a:bodyPr>
+          <a:lstStyle/>
+          <a:p>
+            <a:pPr algn="l">
+              <a:lnSpc>
+                <a:spcPct val="125000"/>
+              </a:lnSpc>
+            </a:pPr>
+            <a:r>
+              <a:rPr sz="1100" b="1">
+                <a:solidFill>
+                  <a:srgbClr val="5E5E5E"/>
+                </a:solidFill>
+                <a:latin typeface="Noto Sans JP"/>
+                <a:ea typeface="Noto Sans JP"/>
+                <a:cs typeface="Noto Sans JP"/>
+              </a:rPr>
+              <a:t>→ 集客の方向性を資料で欲しい方</a:t>
+            </a:r>
+          </a:p>
+        </p:txBody>
+      </p:sp>
+      <p:sp>
+        <p:nvSpPr>
+          <p:cNvPr id="22" name="Rectangle 21"/>
           <p:cNvSpPr/>
           <p:nvPr/>
         </p:nvSpPr>
         <p:spPr>
           <a:xfrm>
-            <a:off x="4396000" y="1700000"/>
-            <a:ext cx="3400000" cy="50800"/>
+            <a:off x="8030000" y="1800000"/>
+            <a:ext cx="3400000" cy="4350000"/>
           </a:xfrm>
           <a:prstGeom prst="rect">
             <a:avLst/>
           </a:prstGeom>
           <a:solidFill>
-            <a:srgbClr val="2B2B2B"/>
+            <a:srgbClr val="FFFFFF"/>
           </a:solidFill>
-          <a:ln>
-            <a:noFill/>
+          <a:ln w="19050">
+            <a:solidFill>
+              <a:srgbClr val="C6A15B"/>
+            </a:solidFill>
           </a:ln>
           <a:effectLst/>
         </p:spPr>
@@ -24047,14 +24928,14 @@
       </p:sp>
       <p:sp>
         <p:nvSpPr>
-          <p:cNvPr id="15" name="TextBox 14"/>
-          <p:cNvSpPr txBox="1"/>
-          <p:nvPr/>
-        </p:nvSpPr>
-        <p:spPr>
-          <a:xfrm>
-            <a:off x="4646000" y="1950000"/>
-            <a:ext cx="2900000" cy="400000"/>
+          <p:cNvPr id="23" name="TextBox 22"/>
+          <p:cNvSpPr txBox="1"/>
+          <p:nvPr/>
+        </p:nvSpPr>
+        <p:spPr>
+          <a:xfrm>
+            <a:off x="8280000" y="2030000"/>
+            <a:ext cx="2900000" cy="300000"/>
           </a:xfrm>
           <a:prstGeom prst="rect">
             <a:avLst/>
@@ -24073,7 +24954,48 @@
               </a:lnSpc>
             </a:pPr>
             <a:r>
-              <a:rPr sz="1500" b="1">
+              <a:rPr sz="1100" b="1">
+                <a:solidFill>
+                  <a:srgbClr val="C6A15B"/>
+                </a:solidFill>
+                <a:latin typeface="Noto Sans JP"/>
+                <a:ea typeface="Noto Sans JP"/>
+                <a:cs typeface="Noto Sans JP"/>
+              </a:rPr>
+              <a:t>STEP 3</a:t>
+            </a:r>
+          </a:p>
+        </p:txBody>
+      </p:sp>
+      <p:sp>
+        <p:nvSpPr>
+          <p:cNvPr id="24" name="TextBox 23"/>
+          <p:cNvSpPr txBox="1"/>
+          <p:nvPr/>
+        </p:nvSpPr>
+        <p:spPr>
+          <a:xfrm>
+            <a:off x="8280000" y="2320000"/>
+            <a:ext cx="2900000" cy="450000"/>
+          </a:xfrm>
+          <a:prstGeom prst="rect">
+            <a:avLst/>
+          </a:prstGeom>
+          <a:noFill/>
+        </p:spPr>
+        <p:txBody>
+          <a:bodyPr wrap="square" anchor="t" lIns="0" rIns="0" tIns="0" bIns="0">
+            <a:spAutoFit/>
+          </a:bodyPr>
+          <a:lstStyle/>
+          <a:p>
+            <a:pPr algn="l">
+              <a:lnSpc>
+                <a:spcPct val="125000"/>
+              </a:lnSpc>
+            </a:pPr>
+            <a:r>
+              <a:rPr sz="2000" b="1">
                 <a:solidFill>
                   <a:srgbClr val="2B2B2B"/>
                 </a:solidFill>
@@ -24081,40 +25003,81 @@
                 <a:ea typeface="Noto Sans JP"/>
                 <a:cs typeface="Noto Sans JP"/>
               </a:rPr>
-              <a:t>LPライティング</a:t>
-            </a:r>
-          </a:p>
-        </p:txBody>
-      </p:sp>
-      <p:sp>
-        <p:nvSpPr>
-          <p:cNvPr id="16" name="TextBox 15"/>
-          <p:cNvSpPr txBox="1"/>
-          <p:nvPr/>
-        </p:nvSpPr>
-        <p:spPr>
-          <a:xfrm>
-            <a:off x="4646000" y="2420000"/>
-            <a:ext cx="2900000" cy="700000"/>
-          </a:xfrm>
-          <a:prstGeom prst="rect">
-            <a:avLst/>
-          </a:prstGeom>
-          <a:noFill/>
-        </p:spPr>
-        <p:txBody>
-          <a:bodyPr wrap="square" anchor="t" lIns="0" rIns="0" tIns="0" bIns="0">
-            <a:spAutoFit/>
-          </a:bodyPr>
-          <a:lstStyle/>
-          <a:p>
-            <a:pPr algn="l">
-              <a:lnSpc>
-                <a:spcPct val="120000"/>
-              </a:lnSpc>
-            </a:pPr>
-            <a:r>
-              <a:rPr sz="1500" b="1">
+              <a:t>顧問プラン</a:t>
+            </a:r>
+          </a:p>
+        </p:txBody>
+      </p:sp>
+      <p:sp>
+        <p:nvSpPr>
+          <p:cNvPr id="25" name="TextBox 24"/>
+          <p:cNvSpPr txBox="1"/>
+          <p:nvPr/>
+        </p:nvSpPr>
+        <p:spPr>
+          <a:xfrm>
+            <a:off x="8280000" y="2850000"/>
+            <a:ext cx="2900000" cy="500000"/>
+          </a:xfrm>
+          <a:prstGeom prst="rect">
+            <a:avLst/>
+          </a:prstGeom>
+          <a:noFill/>
+        </p:spPr>
+        <p:txBody>
+          <a:bodyPr wrap="square" anchor="t" lIns="0" rIns="0" tIns="0" bIns="0">
+            <a:spAutoFit/>
+          </a:bodyPr>
+          <a:lstStyle/>
+          <a:p>
+            <a:pPr algn="l">
+              <a:lnSpc>
+                <a:spcPct val="125000"/>
+              </a:lnSpc>
+            </a:pPr>
+            <a:r>
+              <a:rPr sz="1100" b="0">
+                <a:solidFill>
+                  <a:srgbClr val="5E5E5E"/>
+                </a:solidFill>
+                <a:latin typeface="Noto Sans JP"/>
+                <a:ea typeface="Noto Sans JP"/>
+                <a:cs typeface="Noto Sans JP"/>
+              </a:rPr>
+              <a:t>月額  </a:t>
+            </a:r>
+          </a:p>
+        </p:txBody>
+      </p:sp>
+      <p:sp>
+        <p:nvSpPr>
+          <p:cNvPr id="26" name="TextBox 25"/>
+          <p:cNvSpPr txBox="1"/>
+          <p:nvPr/>
+        </p:nvSpPr>
+        <p:spPr>
+          <a:xfrm>
+            <a:off x="8930000" y="2760000"/>
+            <a:ext cx="2250000" cy="500000"/>
+          </a:xfrm>
+          <a:prstGeom prst="rect">
+            <a:avLst/>
+          </a:prstGeom>
+          <a:noFill/>
+        </p:spPr>
+        <p:txBody>
+          <a:bodyPr wrap="square" anchor="t" lIns="0" rIns="0" tIns="0" bIns="0">
+            <a:spAutoFit/>
+          </a:bodyPr>
+          <a:lstStyle/>
+          <a:p>
+            <a:pPr algn="l">
+              <a:lnSpc>
+                <a:spcPct val="125000"/>
+              </a:lnSpc>
+            </a:pPr>
+            <a:r>
+              <a:rPr sz="2000" b="1">
                 <a:solidFill>
                   <a:srgbClr val="C6A15B"/>
                 </a:solidFill>
@@ -24122,20 +25085,115 @@
                 <a:ea typeface="Noto Sans JP"/>
                 <a:cs typeface="Noto Sans JP"/>
               </a:rPr>
-              <a:t>80,000円〜</a:t>
-            </a:r>
-          </a:p>
-        </p:txBody>
-      </p:sp>
-      <p:sp>
-        <p:nvSpPr>
-          <p:cNvPr id="17" name="TextBox 16"/>
-          <p:cNvSpPr txBox="1"/>
-          <p:nvPr/>
-        </p:nvSpPr>
-        <p:spPr>
-          <a:xfrm>
-            <a:off x="4646000" y="3230000"/>
+              <a:t>49,800円〜</a:t>
+            </a:r>
+          </a:p>
+        </p:txBody>
+      </p:sp>
+      <p:sp>
+        <p:nvSpPr>
+          <p:cNvPr id="27" name="TextBox 26"/>
+          <p:cNvSpPr txBox="1"/>
+          <p:nvPr/>
+        </p:nvSpPr>
+        <p:spPr>
+          <a:xfrm>
+            <a:off x="8280000" y="3400000"/>
+            <a:ext cx="2900000" cy="1700000"/>
+          </a:xfrm>
+          <a:prstGeom prst="rect">
+            <a:avLst/>
+          </a:prstGeom>
+          <a:noFill/>
+        </p:spPr>
+        <p:txBody>
+          <a:bodyPr wrap="square" anchor="t" lIns="0" rIns="0" tIns="0" bIns="0">
+            <a:spAutoFit/>
+          </a:bodyPr>
+          <a:lstStyle/>
+          <a:p>
+            <a:pPr algn="l">
+              <a:lnSpc>
+                <a:spcPct val="150000"/>
+              </a:lnSpc>
+            </a:pPr>
+            <a:r>
+              <a:rPr sz="1200" b="0">
+                <a:solidFill>
+                  <a:srgbClr val="2B2B2B"/>
+                </a:solidFill>
+                <a:latin typeface="Noto Sans JP"/>
+                <a:ea typeface="Noto Sans JP"/>
+                <a:cs typeface="Noto Sans JP"/>
+              </a:rPr>
+              <a:t>・月最大4時間のZoom相談</a:t>
+            </a:r>
+          </a:p>
+          <a:p>
+            <a:pPr algn="l">
+              <a:lnSpc>
+                <a:spcPct val="150000"/>
+              </a:lnSpc>
+            </a:pPr>
+            <a:r>
+              <a:rPr sz="1200" b="0">
+                <a:solidFill>
+                  <a:srgbClr val="2B2B2B"/>
+                </a:solidFill>
+                <a:latin typeface="Noto Sans JP"/>
+                <a:ea typeface="Noto Sans JP"/>
+                <a:cs typeface="Noto Sans JP"/>
+              </a:rPr>
+              <a:t>・制作物への添削・アドバイス</a:t>
+            </a:r>
+          </a:p>
+          <a:p>
+            <a:pPr algn="l">
+              <a:lnSpc>
+                <a:spcPct val="150000"/>
+              </a:lnSpc>
+            </a:pPr>
+            <a:r>
+              <a:rPr sz="1200" b="0">
+                <a:solidFill>
+                  <a:srgbClr val="2B2B2B"/>
+                </a:solidFill>
+                <a:latin typeface="Noto Sans JP"/>
+                <a:ea typeface="Noto Sans JP"/>
+                <a:cs typeface="Noto Sans JP"/>
+              </a:rPr>
+              <a:t>・施策の分析・仮説検証</a:t>
+            </a:r>
+          </a:p>
+          <a:p>
+            <a:pPr algn="l">
+              <a:lnSpc>
+                <a:spcPct val="150000"/>
+              </a:lnSpc>
+            </a:pPr>
+            <a:r>
+              <a:rPr sz="1200" b="0">
+                <a:solidFill>
+                  <a:srgbClr val="2B2B2B"/>
+                </a:solidFill>
+                <a:latin typeface="Noto Sans JP"/>
+                <a:ea typeface="Noto Sans JP"/>
+                <a:cs typeface="Noto Sans JP"/>
+              </a:rPr>
+              <a:t>・カワリミ 20%OFF</a:t>
+            </a:r>
+          </a:p>
+        </p:txBody>
+      </p:sp>
+      <p:sp>
+        <p:nvSpPr>
+          <p:cNvPr id="28" name="TextBox 27"/>
+          <p:cNvSpPr txBox="1"/>
+          <p:nvPr/>
+        </p:nvSpPr>
+        <p:spPr>
+          <a:xfrm>
+            <a:off x="8280000" y="5700000"/>
             <a:ext cx="2900000" cy="300000"/>
           </a:xfrm>
           <a:prstGeom prst="rect">
@@ -24155,7 +25213,7 @@
               </a:lnSpc>
             </a:pPr>
             <a:r>
-              <a:rPr sz="1000" b="0">
+              <a:rPr sz="1100" b="1">
                 <a:solidFill>
                   <a:srgbClr val="5E5E5E"/>
                 </a:solidFill>
@@ -24163,111 +25221,21 @@
                 <a:ea typeface="Noto Sans JP"/>
                 <a:cs typeface="Noto Sans JP"/>
               </a:rPr>
-              <a:t>構成・原稿・ワイヤー作成</a:t>
-            </a:r>
-          </a:p>
-        </p:txBody>
-      </p:sp>
-      <p:sp>
-        <p:nvSpPr>
-          <p:cNvPr id="18" name="Rectangle 17"/>
-          <p:cNvSpPr/>
-          <p:nvPr/>
-        </p:nvSpPr>
-        <p:spPr>
-          <a:xfrm>
-            <a:off x="8030000" y="1700000"/>
-            <a:ext cx="3400000" cy="1950000"/>
-          </a:xfrm>
-          <a:prstGeom prst="rect">
-            <a:avLst/>
-          </a:prstGeom>
-          <a:solidFill>
-            <a:srgbClr val="FFFFFF"/>
-          </a:solidFill>
-          <a:ln w="12700">
-            <a:solidFill>
-              <a:srgbClr val="E5DCC8"/>
-            </a:solidFill>
-          </a:ln>
-          <a:effectLst/>
-        </p:spPr>
-        <p:style>
-          <a:lnRef idx="1">
-            <a:schemeClr val="accent1"/>
-          </a:lnRef>
-          <a:fillRef idx="3">
-            <a:schemeClr val="accent1"/>
-          </a:fillRef>
-          <a:effectRef idx="2">
-            <a:schemeClr val="accent1"/>
-          </a:effectRef>
-          <a:fontRef idx="minor">
-            <a:schemeClr val="lt1"/>
-          </a:fontRef>
-        </p:style>
-        <p:txBody>
-          <a:bodyPr rtlCol="0" anchor="ctr"/>
-          <a:lstStyle/>
-          <a:p>
-            <a:pPr algn="ctr"/>
-          </a:p>
-        </p:txBody>
-      </p:sp>
-      <p:sp>
-        <p:nvSpPr>
-          <p:cNvPr id="19" name="Rectangle 18"/>
-          <p:cNvSpPr/>
-          <p:nvPr/>
-        </p:nvSpPr>
-        <p:spPr>
-          <a:xfrm>
-            <a:off x="8030000" y="1700000"/>
-            <a:ext cx="3400000" cy="50800"/>
-          </a:xfrm>
-          <a:prstGeom prst="rect">
-            <a:avLst/>
-          </a:prstGeom>
-          <a:solidFill>
-            <a:srgbClr val="2B2B2B"/>
-          </a:solidFill>
-          <a:ln>
-            <a:noFill/>
-          </a:ln>
-          <a:effectLst/>
-        </p:spPr>
-        <p:style>
-          <a:lnRef idx="1">
-            <a:schemeClr val="accent1"/>
-          </a:lnRef>
-          <a:fillRef idx="3">
-            <a:schemeClr val="accent1"/>
-          </a:fillRef>
-          <a:effectRef idx="2">
-            <a:schemeClr val="accent1"/>
-          </a:effectRef>
-          <a:fontRef idx="minor">
-            <a:schemeClr val="lt1"/>
-          </a:fontRef>
-        </p:style>
-        <p:txBody>
-          <a:bodyPr rtlCol="0" anchor="ctr"/>
-          <a:lstStyle/>
-          <a:p>
-            <a:pPr algn="ctr"/>
-          </a:p>
-        </p:txBody>
-      </p:sp>
-      <p:sp>
-        <p:nvSpPr>
-          <p:cNvPr id="20" name="TextBox 19"/>
-          <p:cNvSpPr txBox="1"/>
-          <p:nvPr/>
-        </p:nvSpPr>
-        <p:spPr>
-          <a:xfrm>
-            <a:off x="8280000" y="1950000"/>
-            <a:ext cx="2900000" cy="400000"/>
+              <a:t>→ 継続して伴走してほしい方</a:t>
+            </a:r>
+          </a:p>
+        </p:txBody>
+      </p:sp>
+      <p:sp>
+        <p:nvSpPr>
+          <p:cNvPr id="29" name="TextBox 28"/>
+          <p:cNvSpPr txBox="1"/>
+          <p:nvPr/>
+        </p:nvSpPr>
+        <p:spPr>
+          <a:xfrm>
+            <a:off x="762000" y="1600000"/>
+            <a:ext cx="5000000" cy="400000"/>
           </a:xfrm>
           <a:prstGeom prst="rect">
             <a:avLst/>
@@ -24286,7 +25254,7 @@
               </a:lnSpc>
             </a:pPr>
             <a:r>
-              <a:rPr sz="1500" b="1">
+              <a:rPr sz="1400" b="1">
                 <a:solidFill>
                   <a:srgbClr val="2B2B2B"/>
                 </a:solidFill>
@@ -24294,800 +25262,7 @@
                 <a:ea typeface="Noto Sans JP"/>
                 <a:cs typeface="Noto Sans JP"/>
               </a:rPr>
-              <a:t>公式LINE構築・運用</a:t>
-            </a:r>
-          </a:p>
-        </p:txBody>
-      </p:sp>
-      <p:sp>
-        <p:nvSpPr>
-          <p:cNvPr id="21" name="TextBox 20"/>
-          <p:cNvSpPr txBox="1"/>
-          <p:nvPr/>
-        </p:nvSpPr>
-        <p:spPr>
-          <a:xfrm>
-            <a:off x="8280000" y="2420000"/>
-            <a:ext cx="2900000" cy="700000"/>
-          </a:xfrm>
-          <a:prstGeom prst="rect">
-            <a:avLst/>
-          </a:prstGeom>
-          <a:noFill/>
-        </p:spPr>
-        <p:txBody>
-          <a:bodyPr wrap="square" anchor="t" lIns="0" rIns="0" tIns="0" bIns="0">
-            <a:spAutoFit/>
-          </a:bodyPr>
-          <a:lstStyle/>
-          <a:p>
-            <a:pPr algn="l">
-              <a:lnSpc>
-                <a:spcPct val="120000"/>
-              </a:lnSpc>
-            </a:pPr>
-            <a:r>
-              <a:rPr sz="1500" b="1">
-                <a:solidFill>
-                  <a:srgbClr val="C6A15B"/>
-                </a:solidFill>
-                <a:latin typeface="Noto Sans JP"/>
-                <a:ea typeface="Noto Sans JP"/>
-                <a:cs typeface="Noto Sans JP"/>
-              </a:rPr>
-              <a:t>初月50,000円〜</a:t>
-            </a:r>
-          </a:p>
-          <a:p>
-            <a:pPr algn="l">
-              <a:lnSpc>
-                <a:spcPct val="120000"/>
-              </a:lnSpc>
-            </a:pPr>
-            <a:r>
-              <a:rPr sz="1500" b="1">
-                <a:solidFill>
-                  <a:srgbClr val="C6A15B"/>
-                </a:solidFill>
-                <a:latin typeface="Noto Sans JP"/>
-                <a:ea typeface="Noto Sans JP"/>
-                <a:cs typeface="Noto Sans JP"/>
-              </a:rPr>
-              <a:t>月額30,000円〜</a:t>
-            </a:r>
-          </a:p>
-        </p:txBody>
-      </p:sp>
-      <p:sp>
-        <p:nvSpPr>
-          <p:cNvPr id="22" name="TextBox 21"/>
-          <p:cNvSpPr txBox="1"/>
-          <p:nvPr/>
-        </p:nvSpPr>
-        <p:spPr>
-          <a:xfrm>
-            <a:off x="8280000" y="3230000"/>
-            <a:ext cx="2900000" cy="300000"/>
-          </a:xfrm>
-          <a:prstGeom prst="rect">
-            <a:avLst/>
-          </a:prstGeom>
-          <a:noFill/>
-        </p:spPr>
-        <p:txBody>
-          <a:bodyPr wrap="square" anchor="t" lIns="0" rIns="0" tIns="0" bIns="0">
-            <a:spAutoFit/>
-          </a:bodyPr>
-          <a:lstStyle/>
-          <a:p>
-            <a:pPr algn="l">
-              <a:lnSpc>
-                <a:spcPct val="125000"/>
-              </a:lnSpc>
-            </a:pPr>
-            <a:r>
-              <a:rPr sz="1000" b="0">
-                <a:solidFill>
-                  <a:srgbClr val="5E5E5E"/>
-                </a:solidFill>
-                <a:latin typeface="Noto Sans JP"/>
-                <a:ea typeface="Noto Sans JP"/>
-                <a:cs typeface="Noto Sans JP"/>
-              </a:rPr>
-              <a:t>配信代行を含む</a:t>
-            </a:r>
-          </a:p>
-        </p:txBody>
-      </p:sp>
-      <p:sp>
-        <p:nvSpPr>
-          <p:cNvPr id="23" name="Rectangle 22"/>
-          <p:cNvSpPr/>
-          <p:nvPr/>
-        </p:nvSpPr>
-        <p:spPr>
-          <a:xfrm>
-            <a:off x="762000" y="3850000"/>
-            <a:ext cx="3400000" cy="1950000"/>
-          </a:xfrm>
-          <a:prstGeom prst="rect">
-            <a:avLst/>
-          </a:prstGeom>
-          <a:solidFill>
-            <a:srgbClr val="FFFFFF"/>
-          </a:solidFill>
-          <a:ln w="12700">
-            <a:solidFill>
-              <a:srgbClr val="E5DCC8"/>
-            </a:solidFill>
-          </a:ln>
-          <a:effectLst/>
-        </p:spPr>
-        <p:style>
-          <a:lnRef idx="1">
-            <a:schemeClr val="accent1"/>
-          </a:lnRef>
-          <a:fillRef idx="3">
-            <a:schemeClr val="accent1"/>
-          </a:fillRef>
-          <a:effectRef idx="2">
-            <a:schemeClr val="accent1"/>
-          </a:effectRef>
-          <a:fontRef idx="minor">
-            <a:schemeClr val="lt1"/>
-          </a:fontRef>
-        </p:style>
-        <p:txBody>
-          <a:bodyPr rtlCol="0" anchor="ctr"/>
-          <a:lstStyle/>
-          <a:p>
-            <a:pPr algn="ctr"/>
-          </a:p>
-        </p:txBody>
-      </p:sp>
-      <p:sp>
-        <p:nvSpPr>
-          <p:cNvPr id="24" name="Rectangle 23"/>
-          <p:cNvSpPr/>
-          <p:nvPr/>
-        </p:nvSpPr>
-        <p:spPr>
-          <a:xfrm>
-            <a:off x="762000" y="3850000"/>
-            <a:ext cx="3400000" cy="50800"/>
-          </a:xfrm>
-          <a:prstGeom prst="rect">
-            <a:avLst/>
-          </a:prstGeom>
-          <a:solidFill>
-            <a:srgbClr val="2B2B2B"/>
-          </a:solidFill>
-          <a:ln>
-            <a:noFill/>
-          </a:ln>
-          <a:effectLst/>
-        </p:spPr>
-        <p:style>
-          <a:lnRef idx="1">
-            <a:schemeClr val="accent1"/>
-          </a:lnRef>
-          <a:fillRef idx="3">
-            <a:schemeClr val="accent1"/>
-          </a:fillRef>
-          <a:effectRef idx="2">
-            <a:schemeClr val="accent1"/>
-          </a:effectRef>
-          <a:fontRef idx="minor">
-            <a:schemeClr val="lt1"/>
-          </a:fontRef>
-        </p:style>
-        <p:txBody>
-          <a:bodyPr rtlCol="0" anchor="ctr"/>
-          <a:lstStyle/>
-          <a:p>
-            <a:pPr algn="ctr"/>
-          </a:p>
-        </p:txBody>
-      </p:sp>
-      <p:sp>
-        <p:nvSpPr>
-          <p:cNvPr id="25" name="TextBox 24"/>
-          <p:cNvSpPr txBox="1"/>
-          <p:nvPr/>
-        </p:nvSpPr>
-        <p:spPr>
-          <a:xfrm>
-            <a:off x="1012000" y="4100000"/>
-            <a:ext cx="2900000" cy="400000"/>
-          </a:xfrm>
-          <a:prstGeom prst="rect">
-            <a:avLst/>
-          </a:prstGeom>
-          <a:noFill/>
-        </p:spPr>
-        <p:txBody>
-          <a:bodyPr wrap="square" anchor="t" lIns="0" rIns="0" tIns="0" bIns="0">
-            <a:spAutoFit/>
-          </a:bodyPr>
-          <a:lstStyle/>
-          <a:p>
-            <a:pPr algn="l">
-              <a:lnSpc>
-                <a:spcPct val="125000"/>
-              </a:lnSpc>
-            </a:pPr>
-            <a:r>
-              <a:rPr sz="1500" b="1">
-                <a:solidFill>
-                  <a:srgbClr val="2B2B2B"/>
-                </a:solidFill>
-                <a:latin typeface="Noto Sans JP"/>
-                <a:ea typeface="Noto Sans JP"/>
-                <a:cs typeface="Noto Sans JP"/>
-              </a:rPr>
-              <a:t>Meta広告運用</a:t>
-            </a:r>
-          </a:p>
-        </p:txBody>
-      </p:sp>
-      <p:sp>
-        <p:nvSpPr>
-          <p:cNvPr id="26" name="TextBox 25"/>
-          <p:cNvSpPr txBox="1"/>
-          <p:nvPr/>
-        </p:nvSpPr>
-        <p:spPr>
-          <a:xfrm>
-            <a:off x="1012000" y="4570000"/>
-            <a:ext cx="2900000" cy="700000"/>
-          </a:xfrm>
-          <a:prstGeom prst="rect">
-            <a:avLst/>
-          </a:prstGeom>
-          <a:noFill/>
-        </p:spPr>
-        <p:txBody>
-          <a:bodyPr wrap="square" anchor="t" lIns="0" rIns="0" tIns="0" bIns="0">
-            <a:spAutoFit/>
-          </a:bodyPr>
-          <a:lstStyle/>
-          <a:p>
-            <a:pPr algn="l">
-              <a:lnSpc>
-                <a:spcPct val="120000"/>
-              </a:lnSpc>
-            </a:pPr>
-            <a:r>
-              <a:rPr sz="1500" b="1">
-                <a:solidFill>
-                  <a:srgbClr val="C6A15B"/>
-                </a:solidFill>
-                <a:latin typeface="Noto Sans JP"/>
-                <a:ea typeface="Noto Sans JP"/>
-                <a:cs typeface="Noto Sans JP"/>
-              </a:rPr>
-              <a:t>初期30,000円〜</a:t>
-            </a:r>
-          </a:p>
-          <a:p>
-            <a:pPr algn="l">
-              <a:lnSpc>
-                <a:spcPct val="120000"/>
-              </a:lnSpc>
-            </a:pPr>
-            <a:r>
-              <a:rPr sz="1500" b="1">
-                <a:solidFill>
-                  <a:srgbClr val="C6A15B"/>
-                </a:solidFill>
-                <a:latin typeface="Noto Sans JP"/>
-                <a:ea typeface="Noto Sans JP"/>
-                <a:cs typeface="Noto Sans JP"/>
-              </a:rPr>
-              <a:t>月額 広告費の20%</a:t>
-            </a:r>
-          </a:p>
-        </p:txBody>
-      </p:sp>
-      <p:sp>
-        <p:nvSpPr>
-          <p:cNvPr id="27" name="TextBox 26"/>
-          <p:cNvSpPr txBox="1"/>
-          <p:nvPr/>
-        </p:nvSpPr>
-        <p:spPr>
-          <a:xfrm>
-            <a:off x="1012000" y="5380000"/>
-            <a:ext cx="2900000" cy="300000"/>
-          </a:xfrm>
-          <a:prstGeom prst="rect">
-            <a:avLst/>
-          </a:prstGeom>
-          <a:noFill/>
-        </p:spPr>
-        <p:txBody>
-          <a:bodyPr wrap="square" anchor="t" lIns="0" rIns="0" tIns="0" bIns="0">
-            <a:spAutoFit/>
-          </a:bodyPr>
-          <a:lstStyle/>
-          <a:p>
-            <a:pPr algn="l">
-              <a:lnSpc>
-                <a:spcPct val="125000"/>
-              </a:lnSpc>
-            </a:pPr>
-            <a:r>
-              <a:rPr sz="1000" b="0">
-                <a:solidFill>
-                  <a:srgbClr val="5E5E5E"/>
-                </a:solidFill>
-                <a:latin typeface="Noto Sans JP"/>
-                <a:ea typeface="Noto Sans JP"/>
-                <a:cs typeface="Noto Sans JP"/>
-              </a:rPr>
-              <a:t>Facebook・Instagram</a:t>
-            </a:r>
-          </a:p>
-        </p:txBody>
-      </p:sp>
-      <p:sp>
-        <p:nvSpPr>
-          <p:cNvPr id="28" name="Rectangle 27"/>
-          <p:cNvSpPr/>
-          <p:nvPr/>
-        </p:nvSpPr>
-        <p:spPr>
-          <a:xfrm>
-            <a:off x="4396000" y="3850000"/>
-            <a:ext cx="3400000" cy="1950000"/>
-          </a:xfrm>
-          <a:prstGeom prst="rect">
-            <a:avLst/>
-          </a:prstGeom>
-          <a:solidFill>
-            <a:srgbClr val="FFFFFF"/>
-          </a:solidFill>
-          <a:ln w="12700">
-            <a:solidFill>
-              <a:srgbClr val="E5DCC8"/>
-            </a:solidFill>
-          </a:ln>
-          <a:effectLst/>
-        </p:spPr>
-        <p:style>
-          <a:lnRef idx="1">
-            <a:schemeClr val="accent1"/>
-          </a:lnRef>
-          <a:fillRef idx="3">
-            <a:schemeClr val="accent1"/>
-          </a:fillRef>
-          <a:effectRef idx="2">
-            <a:schemeClr val="accent1"/>
-          </a:effectRef>
-          <a:fontRef idx="minor">
-            <a:schemeClr val="lt1"/>
-          </a:fontRef>
-        </p:style>
-        <p:txBody>
-          <a:bodyPr rtlCol="0" anchor="ctr"/>
-          <a:lstStyle/>
-          <a:p>
-            <a:pPr algn="ctr"/>
-          </a:p>
-        </p:txBody>
-      </p:sp>
-      <p:sp>
-        <p:nvSpPr>
-          <p:cNvPr id="29" name="Rectangle 28"/>
-          <p:cNvSpPr/>
-          <p:nvPr/>
-        </p:nvSpPr>
-        <p:spPr>
-          <a:xfrm>
-            <a:off x="4396000" y="3850000"/>
-            <a:ext cx="3400000" cy="50800"/>
-          </a:xfrm>
-          <a:prstGeom prst="rect">
-            <a:avLst/>
-          </a:prstGeom>
-          <a:solidFill>
-            <a:srgbClr val="2B2B2B"/>
-          </a:solidFill>
-          <a:ln>
-            <a:noFill/>
-          </a:ln>
-          <a:effectLst/>
-        </p:spPr>
-        <p:style>
-          <a:lnRef idx="1">
-            <a:schemeClr val="accent1"/>
-          </a:lnRef>
-          <a:fillRef idx="3">
-            <a:schemeClr val="accent1"/>
-          </a:fillRef>
-          <a:effectRef idx="2">
-            <a:schemeClr val="accent1"/>
-          </a:effectRef>
-          <a:fontRef idx="minor">
-            <a:schemeClr val="lt1"/>
-          </a:fontRef>
-        </p:style>
-        <p:txBody>
-          <a:bodyPr rtlCol="0" anchor="ctr"/>
-          <a:lstStyle/>
-          <a:p>
-            <a:pPr algn="ctr"/>
-          </a:p>
-        </p:txBody>
-      </p:sp>
-      <p:sp>
-        <p:nvSpPr>
-          <p:cNvPr id="30" name="TextBox 29"/>
-          <p:cNvSpPr txBox="1"/>
-          <p:nvPr/>
-        </p:nvSpPr>
-        <p:spPr>
-          <a:xfrm>
-            <a:off x="4646000" y="4100000"/>
-            <a:ext cx="2900000" cy="400000"/>
-          </a:xfrm>
-          <a:prstGeom prst="rect">
-            <a:avLst/>
-          </a:prstGeom>
-          <a:noFill/>
-        </p:spPr>
-        <p:txBody>
-          <a:bodyPr wrap="square" anchor="t" lIns="0" rIns="0" tIns="0" bIns="0">
-            <a:spAutoFit/>
-          </a:bodyPr>
-          <a:lstStyle/>
-          <a:p>
-            <a:pPr algn="l">
-              <a:lnSpc>
-                <a:spcPct val="125000"/>
-              </a:lnSpc>
-            </a:pPr>
-            <a:r>
-              <a:rPr sz="1500" b="1">
-                <a:solidFill>
-                  <a:srgbClr val="2B2B2B"/>
-                </a:solidFill>
-                <a:latin typeface="Noto Sans JP"/>
-                <a:ea typeface="Noto Sans JP"/>
-                <a:cs typeface="Noto Sans JP"/>
-              </a:rPr>
-              <a:t>チラシ制作</a:t>
-            </a:r>
-          </a:p>
-        </p:txBody>
-      </p:sp>
-      <p:sp>
-        <p:nvSpPr>
-          <p:cNvPr id="31" name="TextBox 30"/>
-          <p:cNvSpPr txBox="1"/>
-          <p:nvPr/>
-        </p:nvSpPr>
-        <p:spPr>
-          <a:xfrm>
-            <a:off x="4646000" y="4570000"/>
-            <a:ext cx="2900000" cy="700000"/>
-          </a:xfrm>
-          <a:prstGeom prst="rect">
-            <a:avLst/>
-          </a:prstGeom>
-          <a:noFill/>
-        </p:spPr>
-        <p:txBody>
-          <a:bodyPr wrap="square" anchor="t" lIns="0" rIns="0" tIns="0" bIns="0">
-            <a:spAutoFit/>
-          </a:bodyPr>
-          <a:lstStyle/>
-          <a:p>
-            <a:pPr algn="l">
-              <a:lnSpc>
-                <a:spcPct val="120000"/>
-              </a:lnSpc>
-            </a:pPr>
-            <a:r>
-              <a:rPr sz="1500" b="1">
-                <a:solidFill>
-                  <a:srgbClr val="C6A15B"/>
-                </a:solidFill>
-                <a:latin typeface="Noto Sans JP"/>
-                <a:ea typeface="Noto Sans JP"/>
-                <a:cs typeface="Noto Sans JP"/>
-              </a:rPr>
-              <a:t>片面30,000円〜</a:t>
-            </a:r>
-          </a:p>
-          <a:p>
-            <a:pPr algn="l">
-              <a:lnSpc>
-                <a:spcPct val="120000"/>
-              </a:lnSpc>
-            </a:pPr>
-            <a:r>
-              <a:rPr sz="1500" b="1">
-                <a:solidFill>
-                  <a:srgbClr val="C6A15B"/>
-                </a:solidFill>
-                <a:latin typeface="Noto Sans JP"/>
-                <a:ea typeface="Noto Sans JP"/>
-                <a:cs typeface="Noto Sans JP"/>
-              </a:rPr>
-              <a:t>両面50,000円〜</a:t>
-            </a:r>
-          </a:p>
-        </p:txBody>
-      </p:sp>
-      <p:sp>
-        <p:nvSpPr>
-          <p:cNvPr id="32" name="Rectangle 31"/>
-          <p:cNvSpPr/>
-          <p:nvPr/>
-        </p:nvSpPr>
-        <p:spPr>
-          <a:xfrm>
-            <a:off x="8030000" y="3850000"/>
-            <a:ext cx="3400000" cy="1950000"/>
-          </a:xfrm>
-          <a:prstGeom prst="rect">
-            <a:avLst/>
-          </a:prstGeom>
-          <a:solidFill>
-            <a:srgbClr val="FFFFFF"/>
-          </a:solidFill>
-          <a:ln w="12700">
-            <a:solidFill>
-              <a:srgbClr val="E5DCC8"/>
-            </a:solidFill>
-          </a:ln>
-          <a:effectLst/>
-        </p:spPr>
-        <p:style>
-          <a:lnRef idx="1">
-            <a:schemeClr val="accent1"/>
-          </a:lnRef>
-          <a:fillRef idx="3">
-            <a:schemeClr val="accent1"/>
-          </a:fillRef>
-          <a:effectRef idx="2">
-            <a:schemeClr val="accent1"/>
-          </a:effectRef>
-          <a:fontRef idx="minor">
-            <a:schemeClr val="lt1"/>
-          </a:fontRef>
-        </p:style>
-        <p:txBody>
-          <a:bodyPr rtlCol="0" anchor="ctr"/>
-          <a:lstStyle/>
-          <a:p>
-            <a:pPr algn="ctr"/>
-          </a:p>
-        </p:txBody>
-      </p:sp>
-      <p:sp>
-        <p:nvSpPr>
-          <p:cNvPr id="33" name="Rectangle 32"/>
-          <p:cNvSpPr/>
-          <p:nvPr/>
-        </p:nvSpPr>
-        <p:spPr>
-          <a:xfrm>
-            <a:off x="8030000" y="3850000"/>
-            <a:ext cx="3400000" cy="50800"/>
-          </a:xfrm>
-          <a:prstGeom prst="rect">
-            <a:avLst/>
-          </a:prstGeom>
-          <a:solidFill>
-            <a:srgbClr val="2B2B2B"/>
-          </a:solidFill>
-          <a:ln>
-            <a:noFill/>
-          </a:ln>
-          <a:effectLst/>
-        </p:spPr>
-        <p:style>
-          <a:lnRef idx="1">
-            <a:schemeClr val="accent1"/>
-          </a:lnRef>
-          <a:fillRef idx="3">
-            <a:schemeClr val="accent1"/>
-          </a:fillRef>
-          <a:effectRef idx="2">
-            <a:schemeClr val="accent1"/>
-          </a:effectRef>
-          <a:fontRef idx="minor">
-            <a:schemeClr val="lt1"/>
-          </a:fontRef>
-        </p:style>
-        <p:txBody>
-          <a:bodyPr rtlCol="0" anchor="ctr"/>
-          <a:lstStyle/>
-          <a:p>
-            <a:pPr algn="ctr"/>
-          </a:p>
-        </p:txBody>
-      </p:sp>
-      <p:sp>
-        <p:nvSpPr>
-          <p:cNvPr id="34" name="TextBox 33"/>
-          <p:cNvSpPr txBox="1"/>
-          <p:nvPr/>
-        </p:nvSpPr>
-        <p:spPr>
-          <a:xfrm>
-            <a:off x="8280000" y="4100000"/>
-            <a:ext cx="2900000" cy="400000"/>
-          </a:xfrm>
-          <a:prstGeom prst="rect">
-            <a:avLst/>
-          </a:prstGeom>
-          <a:noFill/>
-        </p:spPr>
-        <p:txBody>
-          <a:bodyPr wrap="square" anchor="t" lIns="0" rIns="0" tIns="0" bIns="0">
-            <a:spAutoFit/>
-          </a:bodyPr>
-          <a:lstStyle/>
-          <a:p>
-            <a:pPr algn="l">
-              <a:lnSpc>
-                <a:spcPct val="125000"/>
-              </a:lnSpc>
-            </a:pPr>
-            <a:r>
-              <a:rPr sz="1500" b="1">
-                <a:solidFill>
-                  <a:srgbClr val="2B2B2B"/>
-                </a:solidFill>
-                <a:latin typeface="Noto Sans JP"/>
-                <a:ea typeface="Noto Sans JP"/>
-                <a:cs typeface="Noto Sans JP"/>
-              </a:rPr>
-              <a:t>スピーチ原稿・営業資料</a:t>
-            </a:r>
-          </a:p>
-        </p:txBody>
-      </p:sp>
-      <p:sp>
-        <p:nvSpPr>
-          <p:cNvPr id="35" name="TextBox 34"/>
-          <p:cNvSpPr txBox="1"/>
-          <p:nvPr/>
-        </p:nvSpPr>
-        <p:spPr>
-          <a:xfrm>
-            <a:off x="8280000" y="4570000"/>
-            <a:ext cx="2900000" cy="700000"/>
-          </a:xfrm>
-          <a:prstGeom prst="rect">
-            <a:avLst/>
-          </a:prstGeom>
-          <a:noFill/>
-        </p:spPr>
-        <p:txBody>
-          <a:bodyPr wrap="square" anchor="t" lIns="0" rIns="0" tIns="0" bIns="0">
-            <a:spAutoFit/>
-          </a:bodyPr>
-          <a:lstStyle/>
-          <a:p>
-            <a:pPr algn="l">
-              <a:lnSpc>
-                <a:spcPct val="120000"/>
-              </a:lnSpc>
-            </a:pPr>
-            <a:r>
-              <a:rPr sz="1500" b="1">
-                <a:solidFill>
-                  <a:srgbClr val="C6A15B"/>
-                </a:solidFill>
-                <a:latin typeface="Noto Sans JP"/>
-                <a:ea typeface="Noto Sans JP"/>
-                <a:cs typeface="Noto Sans JP"/>
-              </a:rPr>
-              <a:t>5,000円〜</a:t>
-            </a:r>
-          </a:p>
-          <a:p>
-            <a:pPr algn="l">
-              <a:lnSpc>
-                <a:spcPct val="120000"/>
-              </a:lnSpc>
-            </a:pPr>
-            <a:r>
-              <a:rPr sz="1500" b="1">
-                <a:solidFill>
-                  <a:srgbClr val="C6A15B"/>
-                </a:solidFill>
-                <a:latin typeface="Noto Sans JP"/>
-                <a:ea typeface="Noto Sans JP"/>
-                <a:cs typeface="Noto Sans JP"/>
-              </a:rPr>
-              <a:t>50,000円〜</a:t>
-            </a:r>
-          </a:p>
-        </p:txBody>
-      </p:sp>
-      <p:sp>
-        <p:nvSpPr>
-          <p:cNvPr id="36" name="TextBox 35"/>
-          <p:cNvSpPr txBox="1"/>
-          <p:nvPr/>
-        </p:nvSpPr>
-        <p:spPr>
-          <a:xfrm>
-            <a:off x="8280000" y="5380000"/>
-            <a:ext cx="2900000" cy="300000"/>
-          </a:xfrm>
-          <a:prstGeom prst="rect">
-            <a:avLst/>
-          </a:prstGeom>
-          <a:noFill/>
-        </p:spPr>
-        <p:txBody>
-          <a:bodyPr wrap="square" anchor="t" lIns="0" rIns="0" tIns="0" bIns="0">
-            <a:spAutoFit/>
-          </a:bodyPr>
-          <a:lstStyle/>
-          <a:p>
-            <a:pPr algn="l">
-              <a:lnSpc>
-                <a:spcPct val="125000"/>
-              </a:lnSpc>
-            </a:pPr>
-            <a:r>
-              <a:rPr sz="1000" b="0">
-                <a:solidFill>
-                  <a:srgbClr val="5E5E5E"/>
-                </a:solidFill>
-                <a:latin typeface="Noto Sans JP"/>
-                <a:ea typeface="Noto Sans JP"/>
-                <a:cs typeface="Noto Sans JP"/>
-              </a:rPr>
-              <a:t>30秒スピーチ原稿は5,000円</a:t>
-            </a:r>
-          </a:p>
-        </p:txBody>
-      </p:sp>
-      <p:sp>
-        <p:nvSpPr>
-          <p:cNvPr id="37" name="TextBox 36"/>
-          <p:cNvSpPr txBox="1"/>
-          <p:nvPr/>
-        </p:nvSpPr>
-        <p:spPr>
-          <a:xfrm>
-            <a:off x="762000" y="6050000"/>
-            <a:ext cx="10668000" cy="300000"/>
-          </a:xfrm>
-          <a:prstGeom prst="rect">
-            <a:avLst/>
-          </a:prstGeom>
-          <a:noFill/>
-        </p:spPr>
-        <p:txBody>
-          <a:bodyPr wrap="square" anchor="t" lIns="0" rIns="0" tIns="0" bIns="0">
-            <a:spAutoFit/>
-          </a:bodyPr>
-          <a:lstStyle/>
-          <a:p>
-            <a:pPr algn="l">
-              <a:lnSpc>
-                <a:spcPct val="125000"/>
-              </a:lnSpc>
-            </a:pPr>
-            <a:r>
-              <a:rPr sz="1000" b="0">
-                <a:solidFill>
-                  <a:srgbClr val="5E5E5E"/>
-                </a:solidFill>
-                <a:latin typeface="Noto Sans JP"/>
-                <a:ea typeface="Noto Sans JP"/>
-                <a:cs typeface="Noto Sans JP"/>
-              </a:rPr>
-              <a:t>※ 価格は税込・目安です。内容やボリュームに応じて、事前にお見積りします。</a:t>
+              <a:t>小さく始めて、必要なら次へ。</a:t>
             </a:r>
           </a:p>
         </p:txBody>
@@ -26069,1307 +26244,6 @@
 </p:sld>
 </file>
 
-<file path=ppt/slides/slide30.xml><?xml version="1.0" encoding="utf-8"?>
-<p:sld xmlns:a="http://schemas.openxmlformats.org/drawingml/2006/main" xmlns:p="http://schemas.openxmlformats.org/presentationml/2006/main" xmlns:r="http://schemas.openxmlformats.org/officeDocument/2006/relationships">
-  <p:cSld>
-    <p:bg>
-      <p:bgPr>
-        <a:solidFill>
-          <a:srgbClr val="FFFFFF"/>
-        </a:solidFill>
-        <a:effectLst/>
-      </p:bgPr>
-    </p:bg>
-    <p:spTree>
-      <p:nvGrpSpPr>
-        <p:cNvPr id="1" name=""/>
-        <p:cNvGrpSpPr/>
-        <p:nvPr/>
-      </p:nvGrpSpPr>
-      <p:grpSpPr/>
-      <p:pic>
-        <p:nvPicPr>
-          <p:cNvPr id="2" name="Picture 1" descr="topbar.png"/>
-          <p:cNvPicPr>
-            <a:picLocks noChangeAspect="1"/>
-          </p:cNvPicPr>
-          <p:nvPr/>
-        </p:nvPicPr>
-        <p:blipFill>
-          <a:blip r:embed="rId2"/>
-          <a:stretch>
-            <a:fillRect/>
-          </a:stretch>
-        </p:blipFill>
-        <p:spPr>
-          <a:xfrm>
-            <a:off x="0" y="0"/>
-            <a:ext cx="12192000" cy="142875"/>
-          </a:xfrm>
-          <a:prstGeom prst="rect">
-            <a:avLst/>
-          </a:prstGeom>
-        </p:spPr>
-      </p:pic>
-      <p:sp>
-        <p:nvSpPr>
-          <p:cNvPr id="3" name="TextBox 2"/>
-          <p:cNvSpPr txBox="1"/>
-          <p:nvPr/>
-        </p:nvSpPr>
-        <p:spPr>
-          <a:xfrm>
-            <a:off x="762000" y="470000"/>
-            <a:ext cx="10668000" cy="260000"/>
-          </a:xfrm>
-          <a:prstGeom prst="rect">
-            <a:avLst/>
-          </a:prstGeom>
-          <a:noFill/>
-        </p:spPr>
-        <p:txBody>
-          <a:bodyPr wrap="square" anchor="t" lIns="0" rIns="0" tIns="0" bIns="0">
-            <a:spAutoFit/>
-          </a:bodyPr>
-          <a:lstStyle/>
-          <a:p>
-            <a:pPr algn="l">
-              <a:lnSpc>
-                <a:spcPct val="125000"/>
-              </a:lnSpc>
-            </a:pPr>
-            <a:r>
-              <a:rPr sz="1100" b="1">
-                <a:solidFill>
-                  <a:srgbClr val="C6A15B"/>
-                </a:solidFill>
-                <a:latin typeface="Noto Sans JP"/>
-                <a:ea typeface="Noto Sans JP"/>
-                <a:cs typeface="Noto Sans JP"/>
-              </a:rPr>
-              <a:t>MICHISUJI</a:t>
-            </a:r>
-          </a:p>
-        </p:txBody>
-      </p:sp>
-      <p:sp>
-        <p:nvSpPr>
-          <p:cNvPr id="4" name="TextBox 3"/>
-          <p:cNvSpPr txBox="1"/>
-          <p:nvPr/>
-        </p:nvSpPr>
-        <p:spPr>
-          <a:xfrm>
-            <a:off x="762000" y="740000"/>
-            <a:ext cx="10668000" cy="600000"/>
-          </a:xfrm>
-          <a:prstGeom prst="rect">
-            <a:avLst/>
-          </a:prstGeom>
-          <a:noFill/>
-        </p:spPr>
-        <p:txBody>
-          <a:bodyPr wrap="square" anchor="t" lIns="0" rIns="0" tIns="0" bIns="0">
-            <a:spAutoFit/>
-          </a:bodyPr>
-          <a:lstStyle/>
-          <a:p>
-            <a:pPr algn="l">
-              <a:lnSpc>
-                <a:spcPct val="125000"/>
-              </a:lnSpc>
-            </a:pPr>
-            <a:r>
-              <a:rPr sz="2600" b="1">
-                <a:solidFill>
-                  <a:srgbClr val="2B2B2B"/>
-                </a:solidFill>
-                <a:latin typeface="Noto Sans JP"/>
-                <a:ea typeface="Noto Sans JP"/>
-                <a:cs typeface="Noto Sans JP"/>
-              </a:rPr>
-              <a:t>集客顧問「ミチスジ」― 迷子にならない道筋を、一緒に</a:t>
-            </a:r>
-          </a:p>
-        </p:txBody>
-      </p:sp>
-      <p:sp>
-        <p:nvSpPr>
-          <p:cNvPr id="5" name="Rectangle 4"/>
-          <p:cNvSpPr/>
-          <p:nvPr/>
-        </p:nvSpPr>
-        <p:spPr>
-          <a:xfrm>
-            <a:off x="762000" y="6420000"/>
-            <a:ext cx="10668000" cy="9525"/>
-          </a:xfrm>
-          <a:prstGeom prst="rect">
-            <a:avLst/>
-          </a:prstGeom>
-          <a:solidFill>
-            <a:srgbClr val="E5DCC8"/>
-          </a:solidFill>
-          <a:ln>
-            <a:noFill/>
-          </a:ln>
-          <a:effectLst/>
-        </p:spPr>
-        <p:style>
-          <a:lnRef idx="1">
-            <a:schemeClr val="accent1"/>
-          </a:lnRef>
-          <a:fillRef idx="3">
-            <a:schemeClr val="accent1"/>
-          </a:fillRef>
-          <a:effectRef idx="2">
-            <a:schemeClr val="accent1"/>
-          </a:effectRef>
-          <a:fontRef idx="minor">
-            <a:schemeClr val="lt1"/>
-          </a:fontRef>
-        </p:style>
-        <p:txBody>
-          <a:bodyPr rtlCol="0" anchor="ctr"/>
-          <a:lstStyle/>
-          <a:p>
-            <a:pPr algn="ctr"/>
-          </a:p>
-        </p:txBody>
-      </p:sp>
-      <p:sp>
-        <p:nvSpPr>
-          <p:cNvPr id="6" name="TextBox 5"/>
-          <p:cNvSpPr txBox="1"/>
-          <p:nvPr/>
-        </p:nvSpPr>
-        <p:spPr>
-          <a:xfrm>
-            <a:off x="762000" y="6500000"/>
-            <a:ext cx="4000000" cy="200000"/>
-          </a:xfrm>
-          <a:prstGeom prst="rect">
-            <a:avLst/>
-          </a:prstGeom>
-          <a:noFill/>
-        </p:spPr>
-        <p:txBody>
-          <a:bodyPr wrap="square" anchor="t" lIns="0" rIns="0" tIns="0" bIns="0">
-            <a:spAutoFit/>
-          </a:bodyPr>
-          <a:lstStyle/>
-          <a:p>
-            <a:pPr algn="l">
-              <a:lnSpc>
-                <a:spcPct val="125000"/>
-              </a:lnSpc>
-            </a:pPr>
-            <a:r>
-              <a:rPr sz="800" b="0">
-                <a:solidFill>
-                  <a:srgbClr val="5E5E5E"/>
-                </a:solidFill>
-                <a:latin typeface="Noto Sans JP"/>
-                <a:ea typeface="Noto Sans JP"/>
-                <a:cs typeface="Noto Sans JP"/>
-              </a:rPr>
-              <a:t>© U-Writing All Rights Reserved.</a:t>
-            </a:r>
-          </a:p>
-        </p:txBody>
-      </p:sp>
-      <p:sp>
-        <p:nvSpPr>
-          <p:cNvPr id="7" name="TextBox 6"/>
-          <p:cNvSpPr txBox="1"/>
-          <p:nvPr/>
-        </p:nvSpPr>
-        <p:spPr>
-          <a:xfrm>
-            <a:off x="10830000" y="6470000"/>
-            <a:ext cx="600000" cy="260000"/>
-          </a:xfrm>
-          <a:prstGeom prst="rect">
-            <a:avLst/>
-          </a:prstGeom>
-          <a:noFill/>
-        </p:spPr>
-        <p:txBody>
-          <a:bodyPr wrap="square" anchor="t" lIns="0" rIns="0" tIns="0" bIns="0">
-            <a:spAutoFit/>
-          </a:bodyPr>
-          <a:lstStyle/>
-          <a:p>
-            <a:pPr algn="r">
-              <a:lnSpc>
-                <a:spcPct val="125000"/>
-              </a:lnSpc>
-            </a:pPr>
-            <a:r>
-              <a:rPr sz="1200" b="1">
-                <a:solidFill>
-                  <a:srgbClr val="2B2B2B"/>
-                </a:solidFill>
-                <a:latin typeface="Noto Sans JP"/>
-                <a:ea typeface="Noto Sans JP"/>
-                <a:cs typeface="Noto Sans JP"/>
-              </a:rPr>
-              <a:t>30</a:t>
-            </a:r>
-          </a:p>
-        </p:txBody>
-      </p:sp>
-      <p:sp>
-        <p:nvSpPr>
-          <p:cNvPr id="8" name="Rectangle 7"/>
-          <p:cNvSpPr/>
-          <p:nvPr/>
-        </p:nvSpPr>
-        <p:spPr>
-          <a:xfrm>
-            <a:off x="762000" y="2300000"/>
-            <a:ext cx="3400000" cy="3850000"/>
-          </a:xfrm>
-          <a:prstGeom prst="rect">
-            <a:avLst/>
-          </a:prstGeom>
-          <a:solidFill>
-            <a:srgbClr val="F7F3EA"/>
-          </a:solidFill>
-          <a:ln w="12700">
-            <a:solidFill>
-              <a:srgbClr val="E5DCC8"/>
-            </a:solidFill>
-          </a:ln>
-          <a:effectLst/>
-        </p:spPr>
-        <p:style>
-          <a:lnRef idx="1">
-            <a:schemeClr val="accent1"/>
-          </a:lnRef>
-          <a:fillRef idx="3">
-            <a:schemeClr val="accent1"/>
-          </a:fillRef>
-          <a:effectRef idx="2">
-            <a:schemeClr val="accent1"/>
-          </a:effectRef>
-          <a:fontRef idx="minor">
-            <a:schemeClr val="lt1"/>
-          </a:fontRef>
-        </p:style>
-        <p:txBody>
-          <a:bodyPr rtlCol="0" anchor="ctr"/>
-          <a:lstStyle/>
-          <a:p>
-            <a:pPr algn="ctr"/>
-          </a:p>
-        </p:txBody>
-      </p:sp>
-      <p:sp>
-        <p:nvSpPr>
-          <p:cNvPr id="9" name="TextBox 8"/>
-          <p:cNvSpPr txBox="1"/>
-          <p:nvPr/>
-        </p:nvSpPr>
-        <p:spPr>
-          <a:xfrm>
-            <a:off x="1012000" y="2530000"/>
-            <a:ext cx="2900000" cy="300000"/>
-          </a:xfrm>
-          <a:prstGeom prst="rect">
-            <a:avLst/>
-          </a:prstGeom>
-          <a:noFill/>
-        </p:spPr>
-        <p:txBody>
-          <a:bodyPr wrap="square" anchor="t" lIns="0" rIns="0" tIns="0" bIns="0">
-            <a:spAutoFit/>
-          </a:bodyPr>
-          <a:lstStyle/>
-          <a:p>
-            <a:pPr algn="l">
-              <a:lnSpc>
-                <a:spcPct val="125000"/>
-              </a:lnSpc>
-            </a:pPr>
-            <a:r>
-              <a:rPr sz="1100" b="1">
-                <a:solidFill>
-                  <a:srgbClr val="C6A15B"/>
-                </a:solidFill>
-                <a:latin typeface="Noto Sans JP"/>
-                <a:ea typeface="Noto Sans JP"/>
-                <a:cs typeface="Noto Sans JP"/>
-              </a:rPr>
-              <a:t>STEP 1</a:t>
-            </a:r>
-          </a:p>
-        </p:txBody>
-      </p:sp>
-      <p:sp>
-        <p:nvSpPr>
-          <p:cNvPr id="10" name="TextBox 9"/>
-          <p:cNvSpPr txBox="1"/>
-          <p:nvPr/>
-        </p:nvSpPr>
-        <p:spPr>
-          <a:xfrm>
-            <a:off x="1012000" y="2820000"/>
-            <a:ext cx="2900000" cy="450000"/>
-          </a:xfrm>
-          <a:prstGeom prst="rect">
-            <a:avLst/>
-          </a:prstGeom>
-          <a:noFill/>
-        </p:spPr>
-        <p:txBody>
-          <a:bodyPr wrap="square" anchor="t" lIns="0" rIns="0" tIns="0" bIns="0">
-            <a:spAutoFit/>
-          </a:bodyPr>
-          <a:lstStyle/>
-          <a:p>
-            <a:pPr algn="l">
-              <a:lnSpc>
-                <a:spcPct val="125000"/>
-              </a:lnSpc>
-            </a:pPr>
-            <a:r>
-              <a:rPr sz="2000" b="1">
-                <a:solidFill>
-                  <a:srgbClr val="2B2B2B"/>
-                </a:solidFill>
-                <a:latin typeface="Noto Sans JP"/>
-                <a:ea typeface="Noto Sans JP"/>
-                <a:cs typeface="Noto Sans JP"/>
-              </a:rPr>
-              <a:t>相談プラン</a:t>
-            </a:r>
-          </a:p>
-        </p:txBody>
-      </p:sp>
-      <p:sp>
-        <p:nvSpPr>
-          <p:cNvPr id="11" name="TextBox 10"/>
-          <p:cNvSpPr txBox="1"/>
-          <p:nvPr/>
-        </p:nvSpPr>
-        <p:spPr>
-          <a:xfrm>
-            <a:off x="1012000" y="3350000"/>
-            <a:ext cx="2900000" cy="500000"/>
-          </a:xfrm>
-          <a:prstGeom prst="rect">
-            <a:avLst/>
-          </a:prstGeom>
-          <a:noFill/>
-        </p:spPr>
-        <p:txBody>
-          <a:bodyPr wrap="square" anchor="t" lIns="0" rIns="0" tIns="0" bIns="0">
-            <a:spAutoFit/>
-          </a:bodyPr>
-          <a:lstStyle/>
-          <a:p>
-            <a:pPr algn="l">
-              <a:lnSpc>
-                <a:spcPct val="125000"/>
-              </a:lnSpc>
-            </a:pPr>
-            <a:r>
-              <a:rPr sz="1100" b="0">
-                <a:solidFill>
-                  <a:srgbClr val="5E5E5E"/>
-                </a:solidFill>
-                <a:latin typeface="Noto Sans JP"/>
-                <a:ea typeface="Noto Sans JP"/>
-                <a:cs typeface="Noto Sans JP"/>
-              </a:rPr>
-              <a:t>1回限り  </a:t>
-            </a:r>
-          </a:p>
-        </p:txBody>
-      </p:sp>
-      <p:sp>
-        <p:nvSpPr>
-          <p:cNvPr id="12" name="TextBox 11"/>
-          <p:cNvSpPr txBox="1"/>
-          <p:nvPr/>
-        </p:nvSpPr>
-        <p:spPr>
-          <a:xfrm>
-            <a:off x="1662000" y="3260000"/>
-            <a:ext cx="2250000" cy="500000"/>
-          </a:xfrm>
-          <a:prstGeom prst="rect">
-            <a:avLst/>
-          </a:prstGeom>
-          <a:noFill/>
-        </p:spPr>
-        <p:txBody>
-          <a:bodyPr wrap="square" anchor="t" lIns="0" rIns="0" tIns="0" bIns="0">
-            <a:spAutoFit/>
-          </a:bodyPr>
-          <a:lstStyle/>
-          <a:p>
-            <a:pPr algn="l">
-              <a:lnSpc>
-                <a:spcPct val="125000"/>
-              </a:lnSpc>
-            </a:pPr>
-            <a:r>
-              <a:rPr sz="2000" b="1">
-                <a:solidFill>
-                  <a:srgbClr val="C6A15B"/>
-                </a:solidFill>
-                <a:latin typeface="Noto Sans JP"/>
-                <a:ea typeface="Noto Sans JP"/>
-                <a:cs typeface="Noto Sans JP"/>
-              </a:rPr>
-              <a:t>14,800円〜</a:t>
-            </a:r>
-          </a:p>
-        </p:txBody>
-      </p:sp>
-      <p:sp>
-        <p:nvSpPr>
-          <p:cNvPr id="13" name="TextBox 12"/>
-          <p:cNvSpPr txBox="1"/>
-          <p:nvPr/>
-        </p:nvSpPr>
-        <p:spPr>
-          <a:xfrm>
-            <a:off x="1012000" y="3900000"/>
-            <a:ext cx="2900000" cy="1700000"/>
-          </a:xfrm>
-          <a:prstGeom prst="rect">
-            <a:avLst/>
-          </a:prstGeom>
-          <a:noFill/>
-        </p:spPr>
-        <p:txBody>
-          <a:bodyPr wrap="square" anchor="t" lIns="0" rIns="0" tIns="0" bIns="0">
-            <a:spAutoFit/>
-          </a:bodyPr>
-          <a:lstStyle/>
-          <a:p>
-            <a:pPr algn="l">
-              <a:lnSpc>
-                <a:spcPct val="150000"/>
-              </a:lnSpc>
-            </a:pPr>
-            <a:r>
-              <a:rPr sz="1200" b="0">
-                <a:solidFill>
-                  <a:srgbClr val="2B2B2B"/>
-                </a:solidFill>
-                <a:latin typeface="Noto Sans JP"/>
-                <a:ea typeface="Noto Sans JP"/>
-                <a:cs typeface="Noto Sans JP"/>
-              </a:rPr>
-              <a:t>・最大2時間のZoom相談</a:t>
-            </a:r>
-          </a:p>
-          <a:p>
-            <a:pPr algn="l">
-              <a:lnSpc>
-                <a:spcPct val="150000"/>
-              </a:lnSpc>
-            </a:pPr>
-            <a:r>
-              <a:rPr sz="1200" b="0">
-                <a:solidFill>
-                  <a:srgbClr val="2B2B2B"/>
-                </a:solidFill>
-                <a:latin typeface="Noto Sans JP"/>
-                <a:ea typeface="Noto Sans JP"/>
-                <a:cs typeface="Noto Sans JP"/>
-              </a:rPr>
-              <a:t>・現状の広告物を添削</a:t>
-            </a:r>
-          </a:p>
-          <a:p>
-            <a:pPr algn="l">
-              <a:lnSpc>
-                <a:spcPct val="150000"/>
-              </a:lnSpc>
-            </a:pPr>
-            <a:r>
-              <a:rPr sz="1200" b="0">
-                <a:solidFill>
-                  <a:srgbClr val="2B2B2B"/>
-                </a:solidFill>
-                <a:latin typeface="Noto Sans JP"/>
-                <a:ea typeface="Noto Sans JP"/>
-                <a:cs typeface="Noto Sans JP"/>
-              </a:rPr>
-              <a:t>・まず何から手をつけるか、優先順位をご提案</a:t>
-            </a:r>
-          </a:p>
-        </p:txBody>
-      </p:sp>
-      <p:sp>
-        <p:nvSpPr>
-          <p:cNvPr id="14" name="TextBox 13"/>
-          <p:cNvSpPr txBox="1"/>
-          <p:nvPr/>
-        </p:nvSpPr>
-        <p:spPr>
-          <a:xfrm>
-            <a:off x="1012000" y="5700000"/>
-            <a:ext cx="2900000" cy="300000"/>
-          </a:xfrm>
-          <a:prstGeom prst="rect">
-            <a:avLst/>
-          </a:prstGeom>
-          <a:noFill/>
-        </p:spPr>
-        <p:txBody>
-          <a:bodyPr wrap="square" anchor="t" lIns="0" rIns="0" tIns="0" bIns="0">
-            <a:spAutoFit/>
-          </a:bodyPr>
-          <a:lstStyle/>
-          <a:p>
-            <a:pPr algn="l">
-              <a:lnSpc>
-                <a:spcPct val="125000"/>
-              </a:lnSpc>
-            </a:pPr>
-            <a:r>
-              <a:rPr sz="1100" b="1">
-                <a:solidFill>
-                  <a:srgbClr val="5E5E5E"/>
-                </a:solidFill>
-                <a:latin typeface="Noto Sans JP"/>
-                <a:ea typeface="Noto Sans JP"/>
-                <a:cs typeface="Noto Sans JP"/>
-              </a:rPr>
-              <a:t>→ まず1回、現状を整理したい方</a:t>
-            </a:r>
-          </a:p>
-        </p:txBody>
-      </p:sp>
-      <p:sp>
-        <p:nvSpPr>
-          <p:cNvPr id="15" name="Rectangle 14"/>
-          <p:cNvSpPr/>
-          <p:nvPr/>
-        </p:nvSpPr>
-        <p:spPr>
-          <a:xfrm>
-            <a:off x="4396000" y="2050000"/>
-            <a:ext cx="3400000" cy="4100000"/>
-          </a:xfrm>
-          <a:prstGeom prst="rect">
-            <a:avLst/>
-          </a:prstGeom>
-          <a:solidFill>
-            <a:srgbClr val="F7F3EA"/>
-          </a:solidFill>
-          <a:ln w="12700">
-            <a:solidFill>
-              <a:srgbClr val="E5DCC8"/>
-            </a:solidFill>
-          </a:ln>
-          <a:effectLst/>
-        </p:spPr>
-        <p:style>
-          <a:lnRef idx="1">
-            <a:schemeClr val="accent1"/>
-          </a:lnRef>
-          <a:fillRef idx="3">
-            <a:schemeClr val="accent1"/>
-          </a:fillRef>
-          <a:effectRef idx="2">
-            <a:schemeClr val="accent1"/>
-          </a:effectRef>
-          <a:fontRef idx="minor">
-            <a:schemeClr val="lt1"/>
-          </a:fontRef>
-        </p:style>
-        <p:txBody>
-          <a:bodyPr rtlCol="0" anchor="ctr"/>
-          <a:lstStyle/>
-          <a:p>
-            <a:pPr algn="ctr"/>
-          </a:p>
-        </p:txBody>
-      </p:sp>
-      <p:sp>
-        <p:nvSpPr>
-          <p:cNvPr id="16" name="TextBox 15"/>
-          <p:cNvSpPr txBox="1"/>
-          <p:nvPr/>
-        </p:nvSpPr>
-        <p:spPr>
-          <a:xfrm>
-            <a:off x="4646000" y="2280000"/>
-            <a:ext cx="2900000" cy="300000"/>
-          </a:xfrm>
-          <a:prstGeom prst="rect">
-            <a:avLst/>
-          </a:prstGeom>
-          <a:noFill/>
-        </p:spPr>
-        <p:txBody>
-          <a:bodyPr wrap="square" anchor="t" lIns="0" rIns="0" tIns="0" bIns="0">
-            <a:spAutoFit/>
-          </a:bodyPr>
-          <a:lstStyle/>
-          <a:p>
-            <a:pPr algn="l">
-              <a:lnSpc>
-                <a:spcPct val="125000"/>
-              </a:lnSpc>
-            </a:pPr>
-            <a:r>
-              <a:rPr sz="1100" b="1">
-                <a:solidFill>
-                  <a:srgbClr val="C6A15B"/>
-                </a:solidFill>
-                <a:latin typeface="Noto Sans JP"/>
-                <a:ea typeface="Noto Sans JP"/>
-                <a:cs typeface="Noto Sans JP"/>
-              </a:rPr>
-              <a:t>STEP 2</a:t>
-            </a:r>
-          </a:p>
-        </p:txBody>
-      </p:sp>
-      <p:sp>
-        <p:nvSpPr>
-          <p:cNvPr id="17" name="TextBox 16"/>
-          <p:cNvSpPr txBox="1"/>
-          <p:nvPr/>
-        </p:nvSpPr>
-        <p:spPr>
-          <a:xfrm>
-            <a:off x="4646000" y="2570000"/>
-            <a:ext cx="2900000" cy="450000"/>
-          </a:xfrm>
-          <a:prstGeom prst="rect">
-            <a:avLst/>
-          </a:prstGeom>
-          <a:noFill/>
-        </p:spPr>
-        <p:txBody>
-          <a:bodyPr wrap="square" anchor="t" lIns="0" rIns="0" tIns="0" bIns="0">
-            <a:spAutoFit/>
-          </a:bodyPr>
-          <a:lstStyle/>
-          <a:p>
-            <a:pPr algn="l">
-              <a:lnSpc>
-                <a:spcPct val="125000"/>
-              </a:lnSpc>
-            </a:pPr>
-            <a:r>
-              <a:rPr sz="2000" b="1">
-                <a:solidFill>
-                  <a:srgbClr val="2B2B2B"/>
-                </a:solidFill>
-                <a:latin typeface="Noto Sans JP"/>
-                <a:ea typeface="Noto Sans JP"/>
-                <a:cs typeface="Noto Sans JP"/>
-              </a:rPr>
-              <a:t>提案プラン</a:t>
-            </a:r>
-          </a:p>
-        </p:txBody>
-      </p:sp>
-      <p:sp>
-        <p:nvSpPr>
-          <p:cNvPr id="18" name="TextBox 17"/>
-          <p:cNvSpPr txBox="1"/>
-          <p:nvPr/>
-        </p:nvSpPr>
-        <p:spPr>
-          <a:xfrm>
-            <a:off x="4646000" y="3100000"/>
-            <a:ext cx="2900000" cy="500000"/>
-          </a:xfrm>
-          <a:prstGeom prst="rect">
-            <a:avLst/>
-          </a:prstGeom>
-          <a:noFill/>
-        </p:spPr>
-        <p:txBody>
-          <a:bodyPr wrap="square" anchor="t" lIns="0" rIns="0" tIns="0" bIns="0">
-            <a:spAutoFit/>
-          </a:bodyPr>
-          <a:lstStyle/>
-          <a:p>
-            <a:pPr algn="l">
-              <a:lnSpc>
-                <a:spcPct val="125000"/>
-              </a:lnSpc>
-            </a:pPr>
-            <a:r>
-              <a:rPr sz="1100" b="0">
-                <a:solidFill>
-                  <a:srgbClr val="5E5E5E"/>
-                </a:solidFill>
-                <a:latin typeface="Noto Sans JP"/>
-                <a:ea typeface="Noto Sans JP"/>
-                <a:cs typeface="Noto Sans JP"/>
-              </a:rPr>
-              <a:t>単発  </a:t>
-            </a:r>
-          </a:p>
-        </p:txBody>
-      </p:sp>
-      <p:sp>
-        <p:nvSpPr>
-          <p:cNvPr id="19" name="TextBox 18"/>
-          <p:cNvSpPr txBox="1"/>
-          <p:nvPr/>
-        </p:nvSpPr>
-        <p:spPr>
-          <a:xfrm>
-            <a:off x="5296000" y="3010000"/>
-            <a:ext cx="2250000" cy="500000"/>
-          </a:xfrm>
-          <a:prstGeom prst="rect">
-            <a:avLst/>
-          </a:prstGeom>
-          <a:noFill/>
-        </p:spPr>
-        <p:txBody>
-          <a:bodyPr wrap="square" anchor="t" lIns="0" rIns="0" tIns="0" bIns="0">
-            <a:spAutoFit/>
-          </a:bodyPr>
-          <a:lstStyle/>
-          <a:p>
-            <a:pPr algn="l">
-              <a:lnSpc>
-                <a:spcPct val="125000"/>
-              </a:lnSpc>
-            </a:pPr>
-            <a:r>
-              <a:rPr sz="2000" b="1">
-                <a:solidFill>
-                  <a:srgbClr val="C6A15B"/>
-                </a:solidFill>
-                <a:latin typeface="Noto Sans JP"/>
-                <a:ea typeface="Noto Sans JP"/>
-                <a:cs typeface="Noto Sans JP"/>
-              </a:rPr>
-              <a:t>49,800円〜</a:t>
-            </a:r>
-          </a:p>
-        </p:txBody>
-      </p:sp>
-      <p:sp>
-        <p:nvSpPr>
-          <p:cNvPr id="20" name="TextBox 19"/>
-          <p:cNvSpPr txBox="1"/>
-          <p:nvPr/>
-        </p:nvSpPr>
-        <p:spPr>
-          <a:xfrm>
-            <a:off x="4646000" y="3650000"/>
-            <a:ext cx="2900000" cy="1700000"/>
-          </a:xfrm>
-          <a:prstGeom prst="rect">
-            <a:avLst/>
-          </a:prstGeom>
-          <a:noFill/>
-        </p:spPr>
-        <p:txBody>
-          <a:bodyPr wrap="square" anchor="t" lIns="0" rIns="0" tIns="0" bIns="0">
-            <a:spAutoFit/>
-          </a:bodyPr>
-          <a:lstStyle/>
-          <a:p>
-            <a:pPr algn="l">
-              <a:lnSpc>
-                <a:spcPct val="150000"/>
-              </a:lnSpc>
-            </a:pPr>
-            <a:r>
-              <a:rPr sz="1200" b="0">
-                <a:solidFill>
-                  <a:srgbClr val="2B2B2B"/>
-                </a:solidFill>
-                <a:latin typeface="Noto Sans JP"/>
-                <a:ea typeface="Noto Sans JP"/>
-                <a:cs typeface="Noto Sans JP"/>
-              </a:rPr>
-              <a:t>・現状分析・競合リサーチ</a:t>
-            </a:r>
-          </a:p>
-          <a:p>
-            <a:pPr algn="l">
-              <a:lnSpc>
-                <a:spcPct val="150000"/>
-              </a:lnSpc>
-            </a:pPr>
-            <a:r>
-              <a:rPr sz="1200" b="0">
-                <a:solidFill>
-                  <a:srgbClr val="2B2B2B"/>
-                </a:solidFill>
-                <a:latin typeface="Noto Sans JP"/>
-                <a:ea typeface="Noto Sans JP"/>
-                <a:cs typeface="Noto Sans JP"/>
-              </a:rPr>
-              <a:t>・具体的な施策の提案書を作成</a:t>
-            </a:r>
-          </a:p>
-          <a:p>
-            <a:pPr algn="l">
-              <a:lnSpc>
-                <a:spcPct val="150000"/>
-              </a:lnSpc>
-            </a:pPr>
-            <a:r>
-              <a:rPr sz="1200" b="0">
-                <a:solidFill>
-                  <a:srgbClr val="2B2B2B"/>
-                </a:solidFill>
-                <a:latin typeface="Noto Sans JP"/>
-                <a:ea typeface="Noto Sans JP"/>
-                <a:cs typeface="Noto Sans JP"/>
-              </a:rPr>
-              <a:t>・提案プレゼン・質疑応答</a:t>
-            </a:r>
-          </a:p>
-        </p:txBody>
-      </p:sp>
-      <p:sp>
-        <p:nvSpPr>
-          <p:cNvPr id="21" name="TextBox 20"/>
-          <p:cNvSpPr txBox="1"/>
-          <p:nvPr/>
-        </p:nvSpPr>
-        <p:spPr>
-          <a:xfrm>
-            <a:off x="4646000" y="5700000"/>
-            <a:ext cx="2900000" cy="300000"/>
-          </a:xfrm>
-          <a:prstGeom prst="rect">
-            <a:avLst/>
-          </a:prstGeom>
-          <a:noFill/>
-        </p:spPr>
-        <p:txBody>
-          <a:bodyPr wrap="square" anchor="t" lIns="0" rIns="0" tIns="0" bIns="0">
-            <a:spAutoFit/>
-          </a:bodyPr>
-          <a:lstStyle/>
-          <a:p>
-            <a:pPr algn="l">
-              <a:lnSpc>
-                <a:spcPct val="125000"/>
-              </a:lnSpc>
-            </a:pPr>
-            <a:r>
-              <a:rPr sz="1100" b="1">
-                <a:solidFill>
-                  <a:srgbClr val="5E5E5E"/>
-                </a:solidFill>
-                <a:latin typeface="Noto Sans JP"/>
-                <a:ea typeface="Noto Sans JP"/>
-                <a:cs typeface="Noto Sans JP"/>
-              </a:rPr>
-              <a:t>→ 集客の方向性を資料で欲しい方</a:t>
-            </a:r>
-          </a:p>
-        </p:txBody>
-      </p:sp>
-      <p:sp>
-        <p:nvSpPr>
-          <p:cNvPr id="22" name="Rectangle 21"/>
-          <p:cNvSpPr/>
-          <p:nvPr/>
-        </p:nvSpPr>
-        <p:spPr>
-          <a:xfrm>
-            <a:off x="8030000" y="1800000"/>
-            <a:ext cx="3400000" cy="4350000"/>
-          </a:xfrm>
-          <a:prstGeom prst="rect">
-            <a:avLst/>
-          </a:prstGeom>
-          <a:solidFill>
-            <a:srgbClr val="FFFFFF"/>
-          </a:solidFill>
-          <a:ln w="19050">
-            <a:solidFill>
-              <a:srgbClr val="C6A15B"/>
-            </a:solidFill>
-          </a:ln>
-          <a:effectLst/>
-        </p:spPr>
-        <p:style>
-          <a:lnRef idx="1">
-            <a:schemeClr val="accent1"/>
-          </a:lnRef>
-          <a:fillRef idx="3">
-            <a:schemeClr val="accent1"/>
-          </a:fillRef>
-          <a:effectRef idx="2">
-            <a:schemeClr val="accent1"/>
-          </a:effectRef>
-          <a:fontRef idx="minor">
-            <a:schemeClr val="lt1"/>
-          </a:fontRef>
-        </p:style>
-        <p:txBody>
-          <a:bodyPr rtlCol="0" anchor="ctr"/>
-          <a:lstStyle/>
-          <a:p>
-            <a:pPr algn="ctr"/>
-          </a:p>
-        </p:txBody>
-      </p:sp>
-      <p:sp>
-        <p:nvSpPr>
-          <p:cNvPr id="23" name="TextBox 22"/>
-          <p:cNvSpPr txBox="1"/>
-          <p:nvPr/>
-        </p:nvSpPr>
-        <p:spPr>
-          <a:xfrm>
-            <a:off x="8280000" y="2030000"/>
-            <a:ext cx="2900000" cy="300000"/>
-          </a:xfrm>
-          <a:prstGeom prst="rect">
-            <a:avLst/>
-          </a:prstGeom>
-          <a:noFill/>
-        </p:spPr>
-        <p:txBody>
-          <a:bodyPr wrap="square" anchor="t" lIns="0" rIns="0" tIns="0" bIns="0">
-            <a:spAutoFit/>
-          </a:bodyPr>
-          <a:lstStyle/>
-          <a:p>
-            <a:pPr algn="l">
-              <a:lnSpc>
-                <a:spcPct val="125000"/>
-              </a:lnSpc>
-            </a:pPr>
-            <a:r>
-              <a:rPr sz="1100" b="1">
-                <a:solidFill>
-                  <a:srgbClr val="C6A15B"/>
-                </a:solidFill>
-                <a:latin typeface="Noto Sans JP"/>
-                <a:ea typeface="Noto Sans JP"/>
-                <a:cs typeface="Noto Sans JP"/>
-              </a:rPr>
-              <a:t>STEP 3</a:t>
-            </a:r>
-          </a:p>
-        </p:txBody>
-      </p:sp>
-      <p:sp>
-        <p:nvSpPr>
-          <p:cNvPr id="24" name="TextBox 23"/>
-          <p:cNvSpPr txBox="1"/>
-          <p:nvPr/>
-        </p:nvSpPr>
-        <p:spPr>
-          <a:xfrm>
-            <a:off x="8280000" y="2320000"/>
-            <a:ext cx="2900000" cy="450000"/>
-          </a:xfrm>
-          <a:prstGeom prst="rect">
-            <a:avLst/>
-          </a:prstGeom>
-          <a:noFill/>
-        </p:spPr>
-        <p:txBody>
-          <a:bodyPr wrap="square" anchor="t" lIns="0" rIns="0" tIns="0" bIns="0">
-            <a:spAutoFit/>
-          </a:bodyPr>
-          <a:lstStyle/>
-          <a:p>
-            <a:pPr algn="l">
-              <a:lnSpc>
-                <a:spcPct val="125000"/>
-              </a:lnSpc>
-            </a:pPr>
-            <a:r>
-              <a:rPr sz="2000" b="1">
-                <a:solidFill>
-                  <a:srgbClr val="2B2B2B"/>
-                </a:solidFill>
-                <a:latin typeface="Noto Sans JP"/>
-                <a:ea typeface="Noto Sans JP"/>
-                <a:cs typeface="Noto Sans JP"/>
-              </a:rPr>
-              <a:t>顧問プラン</a:t>
-            </a:r>
-          </a:p>
-        </p:txBody>
-      </p:sp>
-      <p:sp>
-        <p:nvSpPr>
-          <p:cNvPr id="25" name="TextBox 24"/>
-          <p:cNvSpPr txBox="1"/>
-          <p:nvPr/>
-        </p:nvSpPr>
-        <p:spPr>
-          <a:xfrm>
-            <a:off x="8280000" y="2850000"/>
-            <a:ext cx="2900000" cy="500000"/>
-          </a:xfrm>
-          <a:prstGeom prst="rect">
-            <a:avLst/>
-          </a:prstGeom>
-          <a:noFill/>
-        </p:spPr>
-        <p:txBody>
-          <a:bodyPr wrap="square" anchor="t" lIns="0" rIns="0" tIns="0" bIns="0">
-            <a:spAutoFit/>
-          </a:bodyPr>
-          <a:lstStyle/>
-          <a:p>
-            <a:pPr algn="l">
-              <a:lnSpc>
-                <a:spcPct val="125000"/>
-              </a:lnSpc>
-            </a:pPr>
-            <a:r>
-              <a:rPr sz="1100" b="0">
-                <a:solidFill>
-                  <a:srgbClr val="5E5E5E"/>
-                </a:solidFill>
-                <a:latin typeface="Noto Sans JP"/>
-                <a:ea typeface="Noto Sans JP"/>
-                <a:cs typeface="Noto Sans JP"/>
-              </a:rPr>
-              <a:t>月額  </a:t>
-            </a:r>
-          </a:p>
-        </p:txBody>
-      </p:sp>
-      <p:sp>
-        <p:nvSpPr>
-          <p:cNvPr id="26" name="TextBox 25"/>
-          <p:cNvSpPr txBox="1"/>
-          <p:nvPr/>
-        </p:nvSpPr>
-        <p:spPr>
-          <a:xfrm>
-            <a:off x="8930000" y="2760000"/>
-            <a:ext cx="2250000" cy="500000"/>
-          </a:xfrm>
-          <a:prstGeom prst="rect">
-            <a:avLst/>
-          </a:prstGeom>
-          <a:noFill/>
-        </p:spPr>
-        <p:txBody>
-          <a:bodyPr wrap="square" anchor="t" lIns="0" rIns="0" tIns="0" bIns="0">
-            <a:spAutoFit/>
-          </a:bodyPr>
-          <a:lstStyle/>
-          <a:p>
-            <a:pPr algn="l">
-              <a:lnSpc>
-                <a:spcPct val="125000"/>
-              </a:lnSpc>
-            </a:pPr>
-            <a:r>
-              <a:rPr sz="2000" b="1">
-                <a:solidFill>
-                  <a:srgbClr val="C6A15B"/>
-                </a:solidFill>
-                <a:latin typeface="Noto Sans JP"/>
-                <a:ea typeface="Noto Sans JP"/>
-                <a:cs typeface="Noto Sans JP"/>
-              </a:rPr>
-              <a:t>49,800円〜</a:t>
-            </a:r>
-          </a:p>
-        </p:txBody>
-      </p:sp>
-      <p:sp>
-        <p:nvSpPr>
-          <p:cNvPr id="27" name="TextBox 26"/>
-          <p:cNvSpPr txBox="1"/>
-          <p:nvPr/>
-        </p:nvSpPr>
-        <p:spPr>
-          <a:xfrm>
-            <a:off x="8280000" y="3400000"/>
-            <a:ext cx="2900000" cy="1700000"/>
-          </a:xfrm>
-          <a:prstGeom prst="rect">
-            <a:avLst/>
-          </a:prstGeom>
-          <a:noFill/>
-        </p:spPr>
-        <p:txBody>
-          <a:bodyPr wrap="square" anchor="t" lIns="0" rIns="0" tIns="0" bIns="0">
-            <a:spAutoFit/>
-          </a:bodyPr>
-          <a:lstStyle/>
-          <a:p>
-            <a:pPr algn="l">
-              <a:lnSpc>
-                <a:spcPct val="150000"/>
-              </a:lnSpc>
-            </a:pPr>
-            <a:r>
-              <a:rPr sz="1200" b="0">
-                <a:solidFill>
-                  <a:srgbClr val="2B2B2B"/>
-                </a:solidFill>
-                <a:latin typeface="Noto Sans JP"/>
-                <a:ea typeface="Noto Sans JP"/>
-                <a:cs typeface="Noto Sans JP"/>
-              </a:rPr>
-              <a:t>・月最大4時間のZoom相談</a:t>
-            </a:r>
-          </a:p>
-          <a:p>
-            <a:pPr algn="l">
-              <a:lnSpc>
-                <a:spcPct val="150000"/>
-              </a:lnSpc>
-            </a:pPr>
-            <a:r>
-              <a:rPr sz="1200" b="0">
-                <a:solidFill>
-                  <a:srgbClr val="2B2B2B"/>
-                </a:solidFill>
-                <a:latin typeface="Noto Sans JP"/>
-                <a:ea typeface="Noto Sans JP"/>
-                <a:cs typeface="Noto Sans JP"/>
-              </a:rPr>
-              <a:t>・制作物への添削・アドバイス</a:t>
-            </a:r>
-          </a:p>
-          <a:p>
-            <a:pPr algn="l">
-              <a:lnSpc>
-                <a:spcPct val="150000"/>
-              </a:lnSpc>
-            </a:pPr>
-            <a:r>
-              <a:rPr sz="1200" b="0">
-                <a:solidFill>
-                  <a:srgbClr val="2B2B2B"/>
-                </a:solidFill>
-                <a:latin typeface="Noto Sans JP"/>
-                <a:ea typeface="Noto Sans JP"/>
-                <a:cs typeface="Noto Sans JP"/>
-              </a:rPr>
-              <a:t>・施策の分析・仮説検証</a:t>
-            </a:r>
-          </a:p>
-          <a:p>
-            <a:pPr algn="l">
-              <a:lnSpc>
-                <a:spcPct val="150000"/>
-              </a:lnSpc>
-            </a:pPr>
-            <a:r>
-              <a:rPr sz="1200" b="0">
-                <a:solidFill>
-                  <a:srgbClr val="2B2B2B"/>
-                </a:solidFill>
-                <a:latin typeface="Noto Sans JP"/>
-                <a:ea typeface="Noto Sans JP"/>
-                <a:cs typeface="Noto Sans JP"/>
-              </a:rPr>
-              <a:t>・カワリミ 20%OFF</a:t>
-            </a:r>
-          </a:p>
-        </p:txBody>
-      </p:sp>
-      <p:sp>
-        <p:nvSpPr>
-          <p:cNvPr id="28" name="TextBox 27"/>
-          <p:cNvSpPr txBox="1"/>
-          <p:nvPr/>
-        </p:nvSpPr>
-        <p:spPr>
-          <a:xfrm>
-            <a:off x="8280000" y="5700000"/>
-            <a:ext cx="2900000" cy="300000"/>
-          </a:xfrm>
-          <a:prstGeom prst="rect">
-            <a:avLst/>
-          </a:prstGeom>
-          <a:noFill/>
-        </p:spPr>
-        <p:txBody>
-          <a:bodyPr wrap="square" anchor="t" lIns="0" rIns="0" tIns="0" bIns="0">
-            <a:spAutoFit/>
-          </a:bodyPr>
-          <a:lstStyle/>
-          <a:p>
-            <a:pPr algn="l">
-              <a:lnSpc>
-                <a:spcPct val="125000"/>
-              </a:lnSpc>
-            </a:pPr>
-            <a:r>
-              <a:rPr sz="1100" b="1">
-                <a:solidFill>
-                  <a:srgbClr val="5E5E5E"/>
-                </a:solidFill>
-                <a:latin typeface="Noto Sans JP"/>
-                <a:ea typeface="Noto Sans JP"/>
-                <a:cs typeface="Noto Sans JP"/>
-              </a:rPr>
-              <a:t>→ 継続して伴走してほしい方</a:t>
-            </a:r>
-          </a:p>
-        </p:txBody>
-      </p:sp>
-      <p:sp>
-        <p:nvSpPr>
-          <p:cNvPr id="29" name="TextBox 28"/>
-          <p:cNvSpPr txBox="1"/>
-          <p:nvPr/>
-        </p:nvSpPr>
-        <p:spPr>
-          <a:xfrm>
-            <a:off x="762000" y="1600000"/>
-            <a:ext cx="5000000" cy="400000"/>
-          </a:xfrm>
-          <a:prstGeom prst="rect">
-            <a:avLst/>
-          </a:prstGeom>
-          <a:noFill/>
-        </p:spPr>
-        <p:txBody>
-          <a:bodyPr wrap="square" anchor="t" lIns="0" rIns="0" tIns="0" bIns="0">
-            <a:spAutoFit/>
-          </a:bodyPr>
-          <a:lstStyle/>
-          <a:p>
-            <a:pPr algn="l">
-              <a:lnSpc>
-                <a:spcPct val="125000"/>
-              </a:lnSpc>
-            </a:pPr>
-            <a:r>
-              <a:rPr sz="1400" b="1">
-                <a:solidFill>
-                  <a:srgbClr val="2B2B2B"/>
-                </a:solidFill>
-                <a:latin typeface="Noto Sans JP"/>
-                <a:ea typeface="Noto Sans JP"/>
-                <a:cs typeface="Noto Sans JP"/>
-              </a:rPr>
-              <a:t>小さく始めて、必要なら次へ。</a:t>
-            </a:r>
-          </a:p>
-        </p:txBody>
-      </p:sp>
-    </p:spTree>
-  </p:cSld>
-  <p:clrMapOvr>
-    <a:masterClrMapping/>
-  </p:clrMapOvr>
-</p:sld>
-</file>
-
 <file path=ppt/slides/slide4.xml><?xml version="1.0" encoding="utf-8"?>
 <p:sld xmlns:a="http://schemas.openxmlformats.org/drawingml/2006/main" xmlns:p="http://schemas.openxmlformats.org/presentationml/2006/main" xmlns:r="http://schemas.openxmlformats.org/officeDocument/2006/relationships">
   <p:cSld>
@@ -31490,47 +30364,6 @@
           </a:p>
         </p:txBody>
       </p:sp>
-      <p:sp>
-        <p:nvSpPr>
-          <p:cNvPr id="16" name="TextBox 15"/>
-          <p:cNvSpPr txBox="1"/>
-          <p:nvPr/>
-        </p:nvSpPr>
-        <p:spPr>
-          <a:xfrm>
-            <a:off x="6512000" y="5700000"/>
-            <a:ext cx="4918000" cy="400000"/>
-          </a:xfrm>
-          <a:prstGeom prst="rect">
-            <a:avLst/>
-          </a:prstGeom>
-          <a:noFill/>
-        </p:spPr>
-        <p:txBody>
-          <a:bodyPr wrap="square" anchor="t" lIns="0" rIns="0" tIns="0" bIns="0">
-            <a:spAutoFit/>
-          </a:bodyPr>
-          <a:lstStyle/>
-          <a:p>
-            <a:pPr algn="l">
-              <a:lnSpc>
-                <a:spcPct val="130000"/>
-              </a:lnSpc>
-            </a:pPr>
-            <a:r>
-              <a:rPr sz="1000" b="0">
-                <a:solidFill>
-                  <a:srgbClr val="5E5E5E"/>
-                </a:solidFill>
-                <a:latin typeface="Noto Sans JP"/>
-                <a:ea typeface="Noto Sans JP"/>
-                <a:cs typeface="Noto Sans JP"/>
-              </a:rPr>
-              <a:t>関連事例 ▶ CASE 01：寝具を「朝の目覚め」の体験で伝えて目標の279%</a:t>
-            </a:r>
-          </a:p>
-        </p:txBody>
-      </p:sp>
     </p:spTree>
   </p:cSld>
   <p:clrMapOvr>
@@ -32107,47 +30940,6 @@
                 <a:cs typeface="Noto Sans JP"/>
               </a:rPr>
               <a:t>ご本人が当たり前だと思っていることほど、強みになる。</a:t>
-            </a:r>
-          </a:p>
-        </p:txBody>
-      </p:sp>
-      <p:sp>
-        <p:nvSpPr>
-          <p:cNvPr id="16" name="TextBox 15"/>
-          <p:cNvSpPr txBox="1"/>
-          <p:nvPr/>
-        </p:nvSpPr>
-        <p:spPr>
-          <a:xfrm>
-            <a:off x="6512000" y="5700000"/>
-            <a:ext cx="4918000" cy="400000"/>
-          </a:xfrm>
-          <a:prstGeom prst="rect">
-            <a:avLst/>
-          </a:prstGeom>
-          <a:noFill/>
-        </p:spPr>
-        <p:txBody>
-          <a:bodyPr wrap="square" anchor="t" lIns="0" rIns="0" tIns="0" bIns="0">
-            <a:spAutoFit/>
-          </a:bodyPr>
-          <a:lstStyle/>
-          <a:p>
-            <a:pPr algn="l">
-              <a:lnSpc>
-                <a:spcPct val="130000"/>
-              </a:lnSpc>
-            </a:pPr>
-            <a:r>
-              <a:rPr sz="1000" b="0">
-                <a:solidFill>
-                  <a:srgbClr val="5E5E5E"/>
-                </a:solidFill>
-                <a:latin typeface="Noto Sans JP"/>
-                <a:ea typeface="Noto Sans JP"/>
-                <a:cs typeface="Noto Sans JP"/>
-              </a:rPr>
-              <a:t>関連事例 ▶ CASE 04：求める人物像と代表の想いを記事にして、1週間で内定</a:t>
             </a:r>
           </a:p>
         </p:txBody>
